--- a/archive/2026-09-30/xianyu/PPT报告/闲鱼同行爆款分析-2026-09-30.pptx
+++ b/archive/2026-09-30/xianyu/PPT报告/闲鱼同行爆款分析-2026-09-30.pptx
@@ -6,26 +6,6 @@
   </p:sldMasterIdLst>
   <p:sldIdLst>
     <p:sldId id="256" r:id="rId7"/>
-    <p:sldId id="257" r:id="rId8"/>
-    <p:sldId id="258" r:id="rId9"/>
-    <p:sldId id="259" r:id="rId10"/>
-    <p:sldId id="260" r:id="rId11"/>
-    <p:sldId id="261" r:id="rId12"/>
-    <p:sldId id="262" r:id="rId13"/>
-    <p:sldId id="263" r:id="rId14"/>
-    <p:sldId id="264" r:id="rId15"/>
-    <p:sldId id="265" r:id="rId16"/>
-    <p:sldId id="266" r:id="rId17"/>
-    <p:sldId id="267" r:id="rId18"/>
-    <p:sldId id="268" r:id="rId19"/>
-    <p:sldId id="269" r:id="rId20"/>
-    <p:sldId id="270" r:id="rId21"/>
-    <p:sldId id="271" r:id="rId22"/>
-    <p:sldId id="272" r:id="rId23"/>
-    <p:sldId id="273" r:id="rId24"/>
-    <p:sldId id="274" r:id="rId25"/>
-    <p:sldId id="275" r:id="rId26"/>
-    <p:sldId id="276" r:id="rId27"/>
   </p:sldIdLst>
   <p:sldSz cx="12191695" cy="6858000" type="screen4x3"/>
   <p:notesSz cx="6858000" cy="9144000"/>
@@ -3143,1683 +3123,7 @@
               <a:defRPr sz="1800"/>
             </a:pPr>
             <a:r>
-              <a:t>2026-09-30  ·  10 个商品</a:t>
-            </a:r>
-          </a:p>
-        </p:txBody>
-      </p:sp>
-      <p:sp>
-        <p:nvSpPr>
-          <p:cNvPr id="3" name="TextBox 2"/>
-          <p:cNvSpPr txBox="1"/>
-          <p:nvPr/>
-        </p:nvSpPr>
-        <p:spPr>
-          <a:xfrm>
-            <a:off x="731520" y="4206240"/>
-            <a:ext cx="10698480" cy="548640"/>
-          </a:xfrm>
-          <a:prstGeom prst="rect">
-            <a:avLst/>
-          </a:prstGeom>
-          <a:noFill/>
-        </p:spPr>
-        <p:txBody>
-          <a:bodyPr wrap="none">
-            <a:spAutoFit/>
-          </a:bodyPr>
-          <a:lstStyle/>
-          <a:p/>
-          <a:p>
-            <a:pPr>
-              <a:defRPr sz="1400">
-                <a:solidFill>
-                  <a:srgbClr val="C06040"/>
-                </a:solidFill>
-              </a:defRPr>
-            </a:pPr>
-            <a:r>
-              <a:t>* 本页为【演示数据】，仅用于验证链路</a:t>
-            </a:r>
-          </a:p>
-        </p:txBody>
-      </p:sp>
-    </p:spTree>
-  </p:cSld>
-  <p:clrMapOvr>
-    <a:masterClrMapping/>
-  </p:clrMapOvr>
-</p:sld>
-</file>
-
-<file path=ppt/slides/slide10.xml><?xml version="1.0" encoding="utf-8"?>
-<p:sld xmlns:a="http://schemas.openxmlformats.org/drawingml/2006/main" xmlns:p="http://schemas.openxmlformats.org/presentationml/2006/main" xmlns:r="http://schemas.openxmlformats.org/officeDocument/2006/relationships">
-  <p:cSld>
-    <p:spTree>
-      <p:nvGrpSpPr>
-        <p:cNvPr id="1" name=""/>
-        <p:cNvGrpSpPr/>
-        <p:nvPr/>
-      </p:nvGrpSpPr>
-      <p:grpSpPr/>
-      <p:sp>
-        <p:nvSpPr>
-          <p:cNvPr id="2" name="TextBox 1"/>
-          <p:cNvSpPr txBox="1"/>
-          <p:nvPr/>
-        </p:nvSpPr>
-        <p:spPr>
-          <a:xfrm>
-            <a:off x="548640" y="365760"/>
-            <a:ext cx="11064240" cy="6126480"/>
-          </a:xfrm>
-          <a:prstGeom prst="rect">
-            <a:avLst/>
-          </a:prstGeom>
-          <a:noFill/>
-        </p:spPr>
-        <p:txBody>
-          <a:bodyPr wrap="square">
-            <a:spAutoFit/>
-          </a:bodyPr>
-          <a:lstStyle/>
-          <a:p/>
-          <a:p>
-            <a:pPr>
-              <a:defRPr sz="1800" b="1"/>
-            </a:pPr>
-            <a:r>
-              <a:t>#5  [演示] 闲鱼 超自然行动组 同行 2号</a:t>
-            </a:r>
-          </a:p>
-          <a:p>
-            <a:pPr>
-              <a:defRPr sz="1400"/>
-            </a:pPr>
-            <a:r>
-              <a:t>价格：27.0    销量/想要：40人想要</a:t>
-            </a:r>
-          </a:p>
-          <a:p>
-            <a:pPr>
-              <a:defRPr sz="1400"/>
-            </a:pPr>
-            <a:r>
-              <a:t>店铺/卖家：卖家2（演示）    发货地：广东深圳</a:t>
-            </a:r>
-          </a:p>
-          <a:p>
-            <a:pPr>
-              <a:defRPr sz="1400"/>
-            </a:pPr>
-            <a:r>
-              <a:t>SKU：详情页为演示地址或无详情链接</a:t>
-            </a:r>
-          </a:p>
-          <a:p>
-            <a:pPr>
-              <a:defRPr sz="1400"/>
-            </a:pPr>
-            <a:r>
-              <a:t>卖点：待核验</a:t>
-            </a:r>
-          </a:p>
-          <a:p>
-            <a:pPr>
-              <a:defRPr sz="1400"/>
-            </a:pPr>
-            <a:r>
-              <a:t>链接：https://example.invalid/demo/xianyu/5</a:t>
-            </a:r>
-          </a:p>
-        </p:txBody>
-      </p:sp>
-    </p:spTree>
-  </p:cSld>
-  <p:clrMapOvr>
-    <a:masterClrMapping/>
-  </p:clrMapOvr>
-</p:sld>
-</file>
-
-<file path=ppt/slides/slide11.xml><?xml version="1.0" encoding="utf-8"?>
-<p:sld xmlns:a="http://schemas.openxmlformats.org/drawingml/2006/main" xmlns:p="http://schemas.openxmlformats.org/presentationml/2006/main" xmlns:r="http://schemas.openxmlformats.org/officeDocument/2006/relationships">
-  <p:cSld>
-    <p:spTree>
-      <p:nvGrpSpPr>
-        <p:cNvPr id="1" name=""/>
-        <p:cNvGrpSpPr/>
-        <p:nvPr/>
-      </p:nvGrpSpPr>
-      <p:grpSpPr/>
-      <p:pic>
-        <p:nvPicPr>
-          <p:cNvPr id="2" name="Picture 1" descr="详情卡片5.png"/>
-          <p:cNvPicPr>
-            <a:picLocks noChangeAspect="1"/>
-          </p:cNvPicPr>
-          <p:nvPr/>
-        </p:nvPicPr>
-        <p:blipFill>
-          <a:blip r:embed="rId2"/>
-          <a:stretch>
-            <a:fillRect/>
-          </a:stretch>
-        </p:blipFill>
-        <p:spPr>
-          <a:xfrm>
-            <a:off x="499719" y="274320"/>
-            <a:ext cx="11192256" cy="6217920"/>
-          </a:xfrm>
-          <a:prstGeom prst="rect">
-            <a:avLst/>
-          </a:prstGeom>
-        </p:spPr>
-      </p:pic>
-      <p:sp>
-        <p:nvSpPr>
-          <p:cNvPr id="3" name="TextBox 2"/>
-          <p:cNvSpPr txBox="1"/>
-          <p:nvPr/>
-        </p:nvSpPr>
-        <p:spPr>
-          <a:xfrm>
-            <a:off x="365760" y="6309360"/>
-            <a:ext cx="11430000" cy="548640"/>
-          </a:xfrm>
-          <a:prstGeom prst="rect">
-            <a:avLst/>
-          </a:prstGeom>
-          <a:noFill/>
-        </p:spPr>
-        <p:txBody>
-          <a:bodyPr wrap="none">
-            <a:spAutoFit/>
-          </a:bodyPr>
-          <a:lstStyle/>
-          <a:p/>
-          <a:p>
-            <a:pPr>
-              <a:defRPr sz="1200"/>
-            </a:pPr>
-            <a:r>
-              <a:t>商品详情（完整描述） - [演示] 闲鱼 超自然行动组 同行 2号</a:t>
-            </a:r>
-          </a:p>
-        </p:txBody>
-      </p:sp>
-    </p:spTree>
-  </p:cSld>
-  <p:clrMapOvr>
-    <a:masterClrMapping/>
-  </p:clrMapOvr>
-</p:sld>
-</file>
-
-<file path=ppt/slides/slide12.xml><?xml version="1.0" encoding="utf-8"?>
-<p:sld xmlns:a="http://schemas.openxmlformats.org/drawingml/2006/main" xmlns:p="http://schemas.openxmlformats.org/presentationml/2006/main" xmlns:r="http://schemas.openxmlformats.org/officeDocument/2006/relationships">
-  <p:cSld>
-    <p:spTree>
-      <p:nvGrpSpPr>
-        <p:cNvPr id="1" name=""/>
-        <p:cNvGrpSpPr/>
-        <p:nvPr/>
-      </p:nvGrpSpPr>
-      <p:grpSpPr/>
-      <p:sp>
-        <p:nvSpPr>
-          <p:cNvPr id="2" name="TextBox 1"/>
-          <p:cNvSpPr txBox="1"/>
-          <p:nvPr/>
-        </p:nvSpPr>
-        <p:spPr>
-          <a:xfrm>
-            <a:off x="548640" y="365760"/>
-            <a:ext cx="11064240" cy="6126480"/>
-          </a:xfrm>
-          <a:prstGeom prst="rect">
-            <a:avLst/>
-          </a:prstGeom>
-          <a:noFill/>
-        </p:spPr>
-        <p:txBody>
-          <a:bodyPr wrap="square">
-            <a:spAutoFit/>
-          </a:bodyPr>
-          <a:lstStyle/>
-          <a:p/>
-          <a:p>
-            <a:pPr>
-              <a:defRPr sz="1800" b="1"/>
-            </a:pPr>
-            <a:r>
-              <a:t>#6  [演示] 闲鱼 超自然行动组 同行 3号</a:t>
-            </a:r>
-          </a:p>
-          <a:p>
-            <a:pPr>
-              <a:defRPr sz="1400"/>
-            </a:pPr>
-            <a:r>
-              <a:t>价格：33.0    销量/想要：60人想要</a:t>
-            </a:r>
-          </a:p>
-          <a:p>
-            <a:pPr>
-              <a:defRPr sz="1400"/>
-            </a:pPr>
-            <a:r>
-              <a:t>店铺/卖家：卖家3（演示）    发货地：广东深圳</a:t>
-            </a:r>
-          </a:p>
-          <a:p>
-            <a:pPr>
-              <a:defRPr sz="1400"/>
-            </a:pPr>
-            <a:r>
-              <a:t>SKU：详情页为演示地址或无详情链接</a:t>
-            </a:r>
-          </a:p>
-          <a:p>
-            <a:pPr>
-              <a:defRPr sz="1400"/>
-            </a:pPr>
-            <a:r>
-              <a:t>卖点：待核验</a:t>
-            </a:r>
-          </a:p>
-          <a:p>
-            <a:pPr>
-              <a:defRPr sz="1400"/>
-            </a:pPr>
-            <a:r>
-              <a:t>链接：https://example.invalid/demo/xianyu/6</a:t>
-            </a:r>
-          </a:p>
-        </p:txBody>
-      </p:sp>
-    </p:spTree>
-  </p:cSld>
-  <p:clrMapOvr>
-    <a:masterClrMapping/>
-  </p:clrMapOvr>
-</p:sld>
-</file>
-
-<file path=ppt/slides/slide13.xml><?xml version="1.0" encoding="utf-8"?>
-<p:sld xmlns:a="http://schemas.openxmlformats.org/drawingml/2006/main" xmlns:p="http://schemas.openxmlformats.org/presentationml/2006/main" xmlns:r="http://schemas.openxmlformats.org/officeDocument/2006/relationships">
-  <p:cSld>
-    <p:spTree>
-      <p:nvGrpSpPr>
-        <p:cNvPr id="1" name=""/>
-        <p:cNvGrpSpPr/>
-        <p:nvPr/>
-      </p:nvGrpSpPr>
-      <p:grpSpPr/>
-      <p:pic>
-        <p:nvPicPr>
-          <p:cNvPr id="2" name="Picture 1" descr="详情卡片6.png"/>
-          <p:cNvPicPr>
-            <a:picLocks noChangeAspect="1"/>
-          </p:cNvPicPr>
-          <p:nvPr/>
-        </p:nvPicPr>
-        <p:blipFill>
-          <a:blip r:embed="rId2"/>
-          <a:stretch>
-            <a:fillRect/>
-          </a:stretch>
-        </p:blipFill>
-        <p:spPr>
-          <a:xfrm>
-            <a:off x="499719" y="274320"/>
-            <a:ext cx="11192256" cy="6217920"/>
-          </a:xfrm>
-          <a:prstGeom prst="rect">
-            <a:avLst/>
-          </a:prstGeom>
-        </p:spPr>
-      </p:pic>
-      <p:sp>
-        <p:nvSpPr>
-          <p:cNvPr id="3" name="TextBox 2"/>
-          <p:cNvSpPr txBox="1"/>
-          <p:nvPr/>
-        </p:nvSpPr>
-        <p:spPr>
-          <a:xfrm>
-            <a:off x="365760" y="6309360"/>
-            <a:ext cx="11430000" cy="548640"/>
-          </a:xfrm>
-          <a:prstGeom prst="rect">
-            <a:avLst/>
-          </a:prstGeom>
-          <a:noFill/>
-        </p:spPr>
-        <p:txBody>
-          <a:bodyPr wrap="none">
-            <a:spAutoFit/>
-          </a:bodyPr>
-          <a:lstStyle/>
-          <a:p/>
-          <a:p>
-            <a:pPr>
-              <a:defRPr sz="1200"/>
-            </a:pPr>
-            <a:r>
-              <a:t>商品详情（完整描述） - [演示] 闲鱼 超自然行动组 同行 3号</a:t>
-            </a:r>
-          </a:p>
-        </p:txBody>
-      </p:sp>
-    </p:spTree>
-  </p:cSld>
-  <p:clrMapOvr>
-    <a:masterClrMapping/>
-  </p:clrMapOvr>
-</p:sld>
-</file>
-
-<file path=ppt/slides/slide14.xml><?xml version="1.0" encoding="utf-8"?>
-<p:sld xmlns:a="http://schemas.openxmlformats.org/drawingml/2006/main" xmlns:p="http://schemas.openxmlformats.org/presentationml/2006/main" xmlns:r="http://schemas.openxmlformats.org/officeDocument/2006/relationships">
-  <p:cSld>
-    <p:spTree>
-      <p:nvGrpSpPr>
-        <p:cNvPr id="1" name=""/>
-        <p:cNvGrpSpPr/>
-        <p:nvPr/>
-      </p:nvGrpSpPr>
-      <p:grpSpPr/>
-      <p:sp>
-        <p:nvSpPr>
-          <p:cNvPr id="2" name="TextBox 1"/>
-          <p:cNvSpPr txBox="1"/>
-          <p:nvPr/>
-        </p:nvSpPr>
-        <p:spPr>
-          <a:xfrm>
-            <a:off x="548640" y="365760"/>
-            <a:ext cx="11064240" cy="6126480"/>
-          </a:xfrm>
-          <a:prstGeom prst="rect">
-            <a:avLst/>
-          </a:prstGeom>
-          <a:noFill/>
-        </p:spPr>
-        <p:txBody>
-          <a:bodyPr wrap="square">
-            <a:spAutoFit/>
-          </a:bodyPr>
-          <a:lstStyle/>
-          <a:p/>
-          <a:p>
-            <a:pPr>
-              <a:defRPr sz="1800" b="1"/>
-            </a:pPr>
-            <a:r>
-              <a:t>#7  [演示] 闲鱼 摸金陪玩 同行 1号</a:t>
-            </a:r>
-          </a:p>
-          <a:p>
-            <a:pPr>
-              <a:defRPr sz="1400"/>
-            </a:pPr>
-            <a:r>
-              <a:t>价格：21.0    销量/想要：20人想要</a:t>
-            </a:r>
-          </a:p>
-          <a:p>
-            <a:pPr>
-              <a:defRPr sz="1400"/>
-            </a:pPr>
-            <a:r>
-              <a:t>店铺/卖家：卖家1（演示）    发货地：广东深圳</a:t>
-            </a:r>
-          </a:p>
-          <a:p>
-            <a:pPr>
-              <a:defRPr sz="1400"/>
-            </a:pPr>
-            <a:r>
-              <a:t>SKU：详情页为演示地址或无详情链接</a:t>
-            </a:r>
-          </a:p>
-          <a:p>
-            <a:pPr>
-              <a:defRPr sz="1400"/>
-            </a:pPr>
-            <a:r>
-              <a:t>卖点：待核验</a:t>
-            </a:r>
-          </a:p>
-          <a:p>
-            <a:pPr>
-              <a:defRPr sz="1400"/>
-            </a:pPr>
-            <a:r>
-              <a:t>链接：https://example.invalid/demo/xianyu/7</a:t>
-            </a:r>
-          </a:p>
-        </p:txBody>
-      </p:sp>
-    </p:spTree>
-  </p:cSld>
-  <p:clrMapOvr>
-    <a:masterClrMapping/>
-  </p:clrMapOvr>
-</p:sld>
-</file>
-
-<file path=ppt/slides/slide15.xml><?xml version="1.0" encoding="utf-8"?>
-<p:sld xmlns:a="http://schemas.openxmlformats.org/drawingml/2006/main" xmlns:p="http://schemas.openxmlformats.org/presentationml/2006/main" xmlns:r="http://schemas.openxmlformats.org/officeDocument/2006/relationships">
-  <p:cSld>
-    <p:spTree>
-      <p:nvGrpSpPr>
-        <p:cNvPr id="1" name=""/>
-        <p:cNvGrpSpPr/>
-        <p:nvPr/>
-      </p:nvGrpSpPr>
-      <p:grpSpPr/>
-      <p:pic>
-        <p:nvPicPr>
-          <p:cNvPr id="2" name="Picture 1" descr="详情卡片7.png"/>
-          <p:cNvPicPr>
-            <a:picLocks noChangeAspect="1"/>
-          </p:cNvPicPr>
-          <p:nvPr/>
-        </p:nvPicPr>
-        <p:blipFill>
-          <a:blip r:embed="rId2"/>
-          <a:stretch>
-            <a:fillRect/>
-          </a:stretch>
-        </p:blipFill>
-        <p:spPr>
-          <a:xfrm>
-            <a:off x="499719" y="274320"/>
-            <a:ext cx="11192256" cy="6217920"/>
-          </a:xfrm>
-          <a:prstGeom prst="rect">
-            <a:avLst/>
-          </a:prstGeom>
-        </p:spPr>
-      </p:pic>
-      <p:sp>
-        <p:nvSpPr>
-          <p:cNvPr id="3" name="TextBox 2"/>
-          <p:cNvSpPr txBox="1"/>
-          <p:nvPr/>
-        </p:nvSpPr>
-        <p:spPr>
-          <a:xfrm>
-            <a:off x="365760" y="6309360"/>
-            <a:ext cx="11430000" cy="548640"/>
-          </a:xfrm>
-          <a:prstGeom prst="rect">
-            <a:avLst/>
-          </a:prstGeom>
-          <a:noFill/>
-        </p:spPr>
-        <p:txBody>
-          <a:bodyPr wrap="none">
-            <a:spAutoFit/>
-          </a:bodyPr>
-          <a:lstStyle/>
-          <a:p/>
-          <a:p>
-            <a:pPr>
-              <a:defRPr sz="1200"/>
-            </a:pPr>
-            <a:r>
-              <a:t>商品详情（完整描述） - [演示] 闲鱼 摸金陪玩 同行 1号</a:t>
-            </a:r>
-          </a:p>
-        </p:txBody>
-      </p:sp>
-    </p:spTree>
-  </p:cSld>
-  <p:clrMapOvr>
-    <a:masterClrMapping/>
-  </p:clrMapOvr>
-</p:sld>
-</file>
-
-<file path=ppt/slides/slide16.xml><?xml version="1.0" encoding="utf-8"?>
-<p:sld xmlns:a="http://schemas.openxmlformats.org/drawingml/2006/main" xmlns:p="http://schemas.openxmlformats.org/presentationml/2006/main" xmlns:r="http://schemas.openxmlformats.org/officeDocument/2006/relationships">
-  <p:cSld>
-    <p:spTree>
-      <p:nvGrpSpPr>
-        <p:cNvPr id="1" name=""/>
-        <p:cNvGrpSpPr/>
-        <p:nvPr/>
-      </p:nvGrpSpPr>
-      <p:grpSpPr/>
-      <p:sp>
-        <p:nvSpPr>
-          <p:cNvPr id="2" name="TextBox 1"/>
-          <p:cNvSpPr txBox="1"/>
-          <p:nvPr/>
-        </p:nvSpPr>
-        <p:spPr>
-          <a:xfrm>
-            <a:off x="548640" y="365760"/>
-            <a:ext cx="11064240" cy="6126480"/>
-          </a:xfrm>
-          <a:prstGeom prst="rect">
-            <a:avLst/>
-          </a:prstGeom>
-          <a:noFill/>
-        </p:spPr>
-        <p:txBody>
-          <a:bodyPr wrap="square">
-            <a:spAutoFit/>
-          </a:bodyPr>
-          <a:lstStyle/>
-          <a:p/>
-          <a:p>
-            <a:pPr>
-              <a:defRPr sz="1800" b="1"/>
-            </a:pPr>
-            <a:r>
-              <a:t>#8  [演示] 闲鱼 摸金陪玩 同行 2号</a:t>
-            </a:r>
-          </a:p>
-          <a:p>
-            <a:pPr>
-              <a:defRPr sz="1400"/>
-            </a:pPr>
-            <a:r>
-              <a:t>价格：27.0    销量/想要：40人想要</a:t>
-            </a:r>
-          </a:p>
-          <a:p>
-            <a:pPr>
-              <a:defRPr sz="1400"/>
-            </a:pPr>
-            <a:r>
-              <a:t>店铺/卖家：卖家2（演示）    发货地：广东深圳</a:t>
-            </a:r>
-          </a:p>
-          <a:p>
-            <a:pPr>
-              <a:defRPr sz="1400"/>
-            </a:pPr>
-            <a:r>
-              <a:t>SKU：详情页为演示地址或无详情链接</a:t>
-            </a:r>
-          </a:p>
-          <a:p>
-            <a:pPr>
-              <a:defRPr sz="1400"/>
-            </a:pPr>
-            <a:r>
-              <a:t>卖点：待核验</a:t>
-            </a:r>
-          </a:p>
-          <a:p>
-            <a:pPr>
-              <a:defRPr sz="1400"/>
-            </a:pPr>
-            <a:r>
-              <a:t>链接：https://example.invalid/demo/xianyu/8</a:t>
-            </a:r>
-          </a:p>
-        </p:txBody>
-      </p:sp>
-    </p:spTree>
-  </p:cSld>
-  <p:clrMapOvr>
-    <a:masterClrMapping/>
-  </p:clrMapOvr>
-</p:sld>
-</file>
-
-<file path=ppt/slides/slide17.xml><?xml version="1.0" encoding="utf-8"?>
-<p:sld xmlns:a="http://schemas.openxmlformats.org/drawingml/2006/main" xmlns:p="http://schemas.openxmlformats.org/presentationml/2006/main" xmlns:r="http://schemas.openxmlformats.org/officeDocument/2006/relationships">
-  <p:cSld>
-    <p:spTree>
-      <p:nvGrpSpPr>
-        <p:cNvPr id="1" name=""/>
-        <p:cNvGrpSpPr/>
-        <p:nvPr/>
-      </p:nvGrpSpPr>
-      <p:grpSpPr/>
-      <p:pic>
-        <p:nvPicPr>
-          <p:cNvPr id="2" name="Picture 1" descr="详情卡片8.png"/>
-          <p:cNvPicPr>
-            <a:picLocks noChangeAspect="1"/>
-          </p:cNvPicPr>
-          <p:nvPr/>
-        </p:nvPicPr>
-        <p:blipFill>
-          <a:blip r:embed="rId2"/>
-          <a:stretch>
-            <a:fillRect/>
-          </a:stretch>
-        </p:blipFill>
-        <p:spPr>
-          <a:xfrm>
-            <a:off x="499719" y="274320"/>
-            <a:ext cx="11192256" cy="6217920"/>
-          </a:xfrm>
-          <a:prstGeom prst="rect">
-            <a:avLst/>
-          </a:prstGeom>
-        </p:spPr>
-      </p:pic>
-      <p:sp>
-        <p:nvSpPr>
-          <p:cNvPr id="3" name="TextBox 2"/>
-          <p:cNvSpPr txBox="1"/>
-          <p:nvPr/>
-        </p:nvSpPr>
-        <p:spPr>
-          <a:xfrm>
-            <a:off x="365760" y="6309360"/>
-            <a:ext cx="11430000" cy="548640"/>
-          </a:xfrm>
-          <a:prstGeom prst="rect">
-            <a:avLst/>
-          </a:prstGeom>
-          <a:noFill/>
-        </p:spPr>
-        <p:txBody>
-          <a:bodyPr wrap="none">
-            <a:spAutoFit/>
-          </a:bodyPr>
-          <a:lstStyle/>
-          <a:p/>
-          <a:p>
-            <a:pPr>
-              <a:defRPr sz="1200"/>
-            </a:pPr>
-            <a:r>
-              <a:t>商品详情（完整描述） - [演示] 闲鱼 摸金陪玩 同行 2号</a:t>
-            </a:r>
-          </a:p>
-        </p:txBody>
-      </p:sp>
-    </p:spTree>
-  </p:cSld>
-  <p:clrMapOvr>
-    <a:masterClrMapping/>
-  </p:clrMapOvr>
-</p:sld>
-</file>
-
-<file path=ppt/slides/slide18.xml><?xml version="1.0" encoding="utf-8"?>
-<p:sld xmlns:a="http://schemas.openxmlformats.org/drawingml/2006/main" xmlns:p="http://schemas.openxmlformats.org/presentationml/2006/main" xmlns:r="http://schemas.openxmlformats.org/officeDocument/2006/relationships">
-  <p:cSld>
-    <p:spTree>
-      <p:nvGrpSpPr>
-        <p:cNvPr id="1" name=""/>
-        <p:cNvGrpSpPr/>
-        <p:nvPr/>
-      </p:nvGrpSpPr>
-      <p:grpSpPr/>
-      <p:sp>
-        <p:nvSpPr>
-          <p:cNvPr id="2" name="TextBox 1"/>
-          <p:cNvSpPr txBox="1"/>
-          <p:nvPr/>
-        </p:nvSpPr>
-        <p:spPr>
-          <a:xfrm>
-            <a:off x="548640" y="365760"/>
-            <a:ext cx="11064240" cy="6126480"/>
-          </a:xfrm>
-          <a:prstGeom prst="rect">
-            <a:avLst/>
-          </a:prstGeom>
-          <a:noFill/>
-        </p:spPr>
-        <p:txBody>
-          <a:bodyPr wrap="square">
-            <a:spAutoFit/>
-          </a:bodyPr>
-          <a:lstStyle/>
-          <a:p/>
-          <a:p>
-            <a:pPr>
-              <a:defRPr sz="1800" b="1"/>
-            </a:pPr>
-            <a:r>
-              <a:t>#9  [演示] 闲鱼 摸金陪玩 同行 3号</a:t>
-            </a:r>
-          </a:p>
-          <a:p>
-            <a:pPr>
-              <a:defRPr sz="1400"/>
-            </a:pPr>
-            <a:r>
-              <a:t>价格：33.0    销量/想要：60人想要</a:t>
-            </a:r>
-          </a:p>
-          <a:p>
-            <a:pPr>
-              <a:defRPr sz="1400"/>
-            </a:pPr>
-            <a:r>
-              <a:t>店铺/卖家：卖家3（演示）    发货地：广东深圳</a:t>
-            </a:r>
-          </a:p>
-          <a:p>
-            <a:pPr>
-              <a:defRPr sz="1400"/>
-            </a:pPr>
-            <a:r>
-              <a:t>SKU：详情页为演示地址或无详情链接</a:t>
-            </a:r>
-          </a:p>
-          <a:p>
-            <a:pPr>
-              <a:defRPr sz="1400"/>
-            </a:pPr>
-            <a:r>
-              <a:t>卖点：待核验</a:t>
-            </a:r>
-          </a:p>
-          <a:p>
-            <a:pPr>
-              <a:defRPr sz="1400"/>
-            </a:pPr>
-            <a:r>
-              <a:t>链接：https://example.invalid/demo/xianyu/9</a:t>
-            </a:r>
-          </a:p>
-        </p:txBody>
-      </p:sp>
-    </p:spTree>
-  </p:cSld>
-  <p:clrMapOvr>
-    <a:masterClrMapping/>
-  </p:clrMapOvr>
-</p:sld>
-</file>
-
-<file path=ppt/slides/slide19.xml><?xml version="1.0" encoding="utf-8"?>
-<p:sld xmlns:a="http://schemas.openxmlformats.org/drawingml/2006/main" xmlns:p="http://schemas.openxmlformats.org/presentationml/2006/main" xmlns:r="http://schemas.openxmlformats.org/officeDocument/2006/relationships">
-  <p:cSld>
-    <p:spTree>
-      <p:nvGrpSpPr>
-        <p:cNvPr id="1" name=""/>
-        <p:cNvGrpSpPr/>
-        <p:nvPr/>
-      </p:nvGrpSpPr>
-      <p:grpSpPr/>
-      <p:pic>
-        <p:nvPicPr>
-          <p:cNvPr id="2" name="Picture 1" descr="详情卡片9.png"/>
-          <p:cNvPicPr>
-            <a:picLocks noChangeAspect="1"/>
-          </p:cNvPicPr>
-          <p:nvPr/>
-        </p:nvPicPr>
-        <p:blipFill>
-          <a:blip r:embed="rId2"/>
-          <a:stretch>
-            <a:fillRect/>
-          </a:stretch>
-        </p:blipFill>
-        <p:spPr>
-          <a:xfrm>
-            <a:off x="499719" y="274320"/>
-            <a:ext cx="11192256" cy="6217920"/>
-          </a:xfrm>
-          <a:prstGeom prst="rect">
-            <a:avLst/>
-          </a:prstGeom>
-        </p:spPr>
-      </p:pic>
-      <p:sp>
-        <p:nvSpPr>
-          <p:cNvPr id="3" name="TextBox 2"/>
-          <p:cNvSpPr txBox="1"/>
-          <p:nvPr/>
-        </p:nvSpPr>
-        <p:spPr>
-          <a:xfrm>
-            <a:off x="365760" y="6309360"/>
-            <a:ext cx="11430000" cy="548640"/>
-          </a:xfrm>
-          <a:prstGeom prst="rect">
-            <a:avLst/>
-          </a:prstGeom>
-          <a:noFill/>
-        </p:spPr>
-        <p:txBody>
-          <a:bodyPr wrap="none">
-            <a:spAutoFit/>
-          </a:bodyPr>
-          <a:lstStyle/>
-          <a:p/>
-          <a:p>
-            <a:pPr>
-              <a:defRPr sz="1200"/>
-            </a:pPr>
-            <a:r>
-              <a:t>商品详情（完整描述） - [演示] 闲鱼 摸金陪玩 同行 3号</a:t>
-            </a:r>
-          </a:p>
-        </p:txBody>
-      </p:sp>
-    </p:spTree>
-  </p:cSld>
-  <p:clrMapOvr>
-    <a:masterClrMapping/>
-  </p:clrMapOvr>
-</p:sld>
-</file>
-
-<file path=ppt/slides/slide2.xml><?xml version="1.0" encoding="utf-8"?>
-<p:sld xmlns:a="http://schemas.openxmlformats.org/drawingml/2006/main" xmlns:p="http://schemas.openxmlformats.org/presentationml/2006/main" xmlns:r="http://schemas.openxmlformats.org/officeDocument/2006/relationships">
-  <p:cSld>
-    <p:spTree>
-      <p:nvGrpSpPr>
-        <p:cNvPr id="1" name=""/>
-        <p:cNvGrpSpPr/>
-        <p:nvPr/>
-      </p:nvGrpSpPr>
-      <p:grpSpPr/>
-      <p:sp>
-        <p:nvSpPr>
-          <p:cNvPr id="2" name="TextBox 1"/>
-          <p:cNvSpPr txBox="1"/>
-          <p:nvPr/>
-        </p:nvSpPr>
-        <p:spPr>
-          <a:xfrm>
-            <a:off x="548640" y="365760"/>
-            <a:ext cx="11064240" cy="6126480"/>
-          </a:xfrm>
-          <a:prstGeom prst="rect">
-            <a:avLst/>
-          </a:prstGeom>
-          <a:noFill/>
-        </p:spPr>
-        <p:txBody>
-          <a:bodyPr wrap="square">
-            <a:spAutoFit/>
-          </a:bodyPr>
-          <a:lstStyle/>
-          <a:p/>
-          <a:p>
-            <a:pPr>
-              <a:defRPr sz="1800" b="1"/>
-            </a:pPr>
-            <a:r>
-              <a:t>#1  [演示] 闲鱼 超自然行动组摸金陪 同行 1号</a:t>
-            </a:r>
-          </a:p>
-          <a:p>
-            <a:pPr>
-              <a:defRPr sz="1400"/>
-            </a:pPr>
-            <a:r>
-              <a:t>价格：21.0    销量/想要：20人想要</a:t>
-            </a:r>
-          </a:p>
-          <a:p>
-            <a:pPr>
-              <a:defRPr sz="1400"/>
-            </a:pPr>
-            <a:r>
-              <a:t>店铺/卖家：卖家1（演示）    发货地：广东深圳</a:t>
-            </a:r>
-          </a:p>
-          <a:p>
-            <a:pPr>
-              <a:defRPr sz="1400"/>
-            </a:pPr>
-            <a:r>
-              <a:t>SKU：详情页为演示地址或无详情链接</a:t>
-            </a:r>
-          </a:p>
-          <a:p>
-            <a:pPr>
-              <a:defRPr sz="1400"/>
-            </a:pPr>
-            <a:r>
-              <a:t>卖点：待核验</a:t>
-            </a:r>
-          </a:p>
-          <a:p>
-            <a:pPr>
-              <a:defRPr sz="1400"/>
-            </a:pPr>
-            <a:r>
-              <a:t>链接：https://example.invalid/demo/xianyu/1</a:t>
-            </a:r>
-          </a:p>
-        </p:txBody>
-      </p:sp>
-    </p:spTree>
-  </p:cSld>
-  <p:clrMapOvr>
-    <a:masterClrMapping/>
-  </p:clrMapOvr>
-</p:sld>
-</file>
-
-<file path=ppt/slides/slide20.xml><?xml version="1.0" encoding="utf-8"?>
-<p:sld xmlns:a="http://schemas.openxmlformats.org/drawingml/2006/main" xmlns:p="http://schemas.openxmlformats.org/presentationml/2006/main" xmlns:r="http://schemas.openxmlformats.org/officeDocument/2006/relationships">
-  <p:cSld>
-    <p:spTree>
-      <p:nvGrpSpPr>
-        <p:cNvPr id="1" name=""/>
-        <p:cNvGrpSpPr/>
-        <p:nvPr/>
-      </p:nvGrpSpPr>
-      <p:grpSpPr/>
-      <p:sp>
-        <p:nvSpPr>
-          <p:cNvPr id="2" name="TextBox 1"/>
-          <p:cNvSpPr txBox="1"/>
-          <p:nvPr/>
-        </p:nvSpPr>
-        <p:spPr>
-          <a:xfrm>
-            <a:off x="548640" y="365760"/>
-            <a:ext cx="11064240" cy="6126480"/>
-          </a:xfrm>
-          <a:prstGeom prst="rect">
-            <a:avLst/>
-          </a:prstGeom>
-          <a:noFill/>
-        </p:spPr>
-        <p:txBody>
-          <a:bodyPr wrap="square">
-            <a:spAutoFit/>
-          </a:bodyPr>
-          <a:lstStyle/>
-          <a:p/>
-          <a:p>
-            <a:pPr>
-              <a:defRPr sz="1800" b="1"/>
-            </a:pPr>
-            <a:r>
-              <a:t>#10  [演示] 闲鱼 超自然摸金陪 同行 1号</a:t>
-            </a:r>
-          </a:p>
-          <a:p>
-            <a:pPr>
-              <a:defRPr sz="1400"/>
-            </a:pPr>
-            <a:r>
-              <a:t>价格：21.0    销量/想要：20人想要</a:t>
-            </a:r>
-          </a:p>
-          <a:p>
-            <a:pPr>
-              <a:defRPr sz="1400"/>
-            </a:pPr>
-            <a:r>
-              <a:t>店铺/卖家：卖家1（演示）    发货地：广东深圳</a:t>
-            </a:r>
-          </a:p>
-          <a:p>
-            <a:pPr>
-              <a:defRPr sz="1400"/>
-            </a:pPr>
-            <a:r>
-              <a:t>SKU：详情页为演示地址或无详情链接</a:t>
-            </a:r>
-          </a:p>
-          <a:p>
-            <a:pPr>
-              <a:defRPr sz="1400"/>
-            </a:pPr>
-            <a:r>
-              <a:t>卖点：待核验</a:t>
-            </a:r>
-          </a:p>
-          <a:p>
-            <a:pPr>
-              <a:defRPr sz="1400"/>
-            </a:pPr>
-            <a:r>
-              <a:t>链接：https://example.invalid/demo/xianyu/10</a:t>
-            </a:r>
-          </a:p>
-        </p:txBody>
-      </p:sp>
-    </p:spTree>
-  </p:cSld>
-  <p:clrMapOvr>
-    <a:masterClrMapping/>
-  </p:clrMapOvr>
-</p:sld>
-</file>
-
-<file path=ppt/slides/slide21.xml><?xml version="1.0" encoding="utf-8"?>
-<p:sld xmlns:a="http://schemas.openxmlformats.org/drawingml/2006/main" xmlns:p="http://schemas.openxmlformats.org/presentationml/2006/main" xmlns:r="http://schemas.openxmlformats.org/officeDocument/2006/relationships">
-  <p:cSld>
-    <p:spTree>
-      <p:nvGrpSpPr>
-        <p:cNvPr id="1" name=""/>
-        <p:cNvGrpSpPr/>
-        <p:nvPr/>
-      </p:nvGrpSpPr>
-      <p:grpSpPr/>
-      <p:pic>
-        <p:nvPicPr>
-          <p:cNvPr id="2" name="Picture 1" descr="详情卡片4.png"/>
-          <p:cNvPicPr>
-            <a:picLocks noChangeAspect="1"/>
-          </p:cNvPicPr>
-          <p:nvPr/>
-        </p:nvPicPr>
-        <p:blipFill>
-          <a:blip r:embed="rId2"/>
-          <a:stretch>
-            <a:fillRect/>
-          </a:stretch>
-        </p:blipFill>
-        <p:spPr>
-          <a:xfrm>
-            <a:off x="499719" y="274320"/>
-            <a:ext cx="11192256" cy="6217920"/>
-          </a:xfrm>
-          <a:prstGeom prst="rect">
-            <a:avLst/>
-          </a:prstGeom>
-        </p:spPr>
-      </p:pic>
-      <p:sp>
-        <p:nvSpPr>
-          <p:cNvPr id="3" name="TextBox 2"/>
-          <p:cNvSpPr txBox="1"/>
-          <p:nvPr/>
-        </p:nvSpPr>
-        <p:spPr>
-          <a:xfrm>
-            <a:off x="365760" y="6309360"/>
-            <a:ext cx="11430000" cy="548640"/>
-          </a:xfrm>
-          <a:prstGeom prst="rect">
-            <a:avLst/>
-          </a:prstGeom>
-          <a:noFill/>
-        </p:spPr>
-        <p:txBody>
-          <a:bodyPr wrap="none">
-            <a:spAutoFit/>
-          </a:bodyPr>
-          <a:lstStyle/>
-          <a:p/>
-          <a:p>
-            <a:pPr>
-              <a:defRPr sz="1200"/>
-            </a:pPr>
-            <a:r>
-              <a:t>商品详情（完整描述） - [演示] 闲鱼 超自然摸金陪 同行 1号</a:t>
-            </a:r>
-          </a:p>
-        </p:txBody>
-      </p:sp>
-    </p:spTree>
-  </p:cSld>
-  <p:clrMapOvr>
-    <a:masterClrMapping/>
-  </p:clrMapOvr>
-</p:sld>
-</file>
-
-<file path=ppt/slides/slide3.xml><?xml version="1.0" encoding="utf-8"?>
-<p:sld xmlns:a="http://schemas.openxmlformats.org/drawingml/2006/main" xmlns:p="http://schemas.openxmlformats.org/presentationml/2006/main" xmlns:r="http://schemas.openxmlformats.org/officeDocument/2006/relationships">
-  <p:cSld>
-    <p:spTree>
-      <p:nvGrpSpPr>
-        <p:cNvPr id="1" name=""/>
-        <p:cNvGrpSpPr/>
-        <p:nvPr/>
-      </p:nvGrpSpPr>
-      <p:grpSpPr/>
-      <p:pic>
-        <p:nvPicPr>
-          <p:cNvPr id="2" name="Picture 1" descr="详情卡片1.png"/>
-          <p:cNvPicPr>
-            <a:picLocks noChangeAspect="1"/>
-          </p:cNvPicPr>
-          <p:nvPr/>
-        </p:nvPicPr>
-        <p:blipFill>
-          <a:blip r:embed="rId2"/>
-          <a:stretch>
-            <a:fillRect/>
-          </a:stretch>
-        </p:blipFill>
-        <p:spPr>
-          <a:xfrm>
-            <a:off x="499719" y="274320"/>
-            <a:ext cx="11192256" cy="6217920"/>
-          </a:xfrm>
-          <a:prstGeom prst="rect">
-            <a:avLst/>
-          </a:prstGeom>
-        </p:spPr>
-      </p:pic>
-      <p:sp>
-        <p:nvSpPr>
-          <p:cNvPr id="3" name="TextBox 2"/>
-          <p:cNvSpPr txBox="1"/>
-          <p:nvPr/>
-        </p:nvSpPr>
-        <p:spPr>
-          <a:xfrm>
-            <a:off x="365760" y="6309360"/>
-            <a:ext cx="11430000" cy="548640"/>
-          </a:xfrm>
-          <a:prstGeom prst="rect">
-            <a:avLst/>
-          </a:prstGeom>
-          <a:noFill/>
-        </p:spPr>
-        <p:txBody>
-          <a:bodyPr wrap="none">
-            <a:spAutoFit/>
-          </a:bodyPr>
-          <a:lstStyle/>
-          <a:p/>
-          <a:p>
-            <a:pPr>
-              <a:defRPr sz="1200"/>
-            </a:pPr>
-            <a:r>
-              <a:t>商品详情（完整描述） - [演示] 闲鱼 超自然行动组摸金陪 同行 1号</a:t>
-            </a:r>
-          </a:p>
-        </p:txBody>
-      </p:sp>
-    </p:spTree>
-  </p:cSld>
-  <p:clrMapOvr>
-    <a:masterClrMapping/>
-  </p:clrMapOvr>
-</p:sld>
-</file>
-
-<file path=ppt/slides/slide4.xml><?xml version="1.0" encoding="utf-8"?>
-<p:sld xmlns:a="http://schemas.openxmlformats.org/drawingml/2006/main" xmlns:p="http://schemas.openxmlformats.org/presentationml/2006/main" xmlns:r="http://schemas.openxmlformats.org/officeDocument/2006/relationships">
-  <p:cSld>
-    <p:spTree>
-      <p:nvGrpSpPr>
-        <p:cNvPr id="1" name=""/>
-        <p:cNvGrpSpPr/>
-        <p:nvPr/>
-      </p:nvGrpSpPr>
-      <p:grpSpPr/>
-      <p:sp>
-        <p:nvSpPr>
-          <p:cNvPr id="2" name="TextBox 1"/>
-          <p:cNvSpPr txBox="1"/>
-          <p:nvPr/>
-        </p:nvSpPr>
-        <p:spPr>
-          <a:xfrm>
-            <a:off x="548640" y="365760"/>
-            <a:ext cx="11064240" cy="6126480"/>
-          </a:xfrm>
-          <a:prstGeom prst="rect">
-            <a:avLst/>
-          </a:prstGeom>
-          <a:noFill/>
-        </p:spPr>
-        <p:txBody>
-          <a:bodyPr wrap="square">
-            <a:spAutoFit/>
-          </a:bodyPr>
-          <a:lstStyle/>
-          <a:p/>
-          <a:p>
-            <a:pPr>
-              <a:defRPr sz="1800" b="1"/>
-            </a:pPr>
-            <a:r>
-              <a:t>#2  [演示] 闲鱼 超自然行动组摸金陪 同行 2号</a:t>
-            </a:r>
-          </a:p>
-          <a:p>
-            <a:pPr>
-              <a:defRPr sz="1400"/>
-            </a:pPr>
-            <a:r>
-              <a:t>价格：27.0    销量/想要：40人想要</a:t>
-            </a:r>
-          </a:p>
-          <a:p>
-            <a:pPr>
-              <a:defRPr sz="1400"/>
-            </a:pPr>
-            <a:r>
-              <a:t>店铺/卖家：卖家2（演示）    发货地：广东深圳</a:t>
-            </a:r>
-          </a:p>
-          <a:p>
-            <a:pPr>
-              <a:defRPr sz="1400"/>
-            </a:pPr>
-            <a:r>
-              <a:t>SKU：详情页为演示地址或无详情链接</a:t>
-            </a:r>
-          </a:p>
-          <a:p>
-            <a:pPr>
-              <a:defRPr sz="1400"/>
-            </a:pPr>
-            <a:r>
-              <a:t>卖点：待核验</a:t>
-            </a:r>
-          </a:p>
-          <a:p>
-            <a:pPr>
-              <a:defRPr sz="1400"/>
-            </a:pPr>
-            <a:r>
-              <a:t>链接：https://example.invalid/demo/xianyu/2</a:t>
-            </a:r>
-          </a:p>
-        </p:txBody>
-      </p:sp>
-    </p:spTree>
-  </p:cSld>
-  <p:clrMapOvr>
-    <a:masterClrMapping/>
-  </p:clrMapOvr>
-</p:sld>
-</file>
-
-<file path=ppt/slides/slide5.xml><?xml version="1.0" encoding="utf-8"?>
-<p:sld xmlns:a="http://schemas.openxmlformats.org/drawingml/2006/main" xmlns:p="http://schemas.openxmlformats.org/presentationml/2006/main" xmlns:r="http://schemas.openxmlformats.org/officeDocument/2006/relationships">
-  <p:cSld>
-    <p:spTree>
-      <p:nvGrpSpPr>
-        <p:cNvPr id="1" name=""/>
-        <p:cNvGrpSpPr/>
-        <p:nvPr/>
-      </p:nvGrpSpPr>
-      <p:grpSpPr/>
-      <p:pic>
-        <p:nvPicPr>
-          <p:cNvPr id="2" name="Picture 1" descr="详情卡片2.png"/>
-          <p:cNvPicPr>
-            <a:picLocks noChangeAspect="1"/>
-          </p:cNvPicPr>
-          <p:nvPr/>
-        </p:nvPicPr>
-        <p:blipFill>
-          <a:blip r:embed="rId2"/>
-          <a:stretch>
-            <a:fillRect/>
-          </a:stretch>
-        </p:blipFill>
-        <p:spPr>
-          <a:xfrm>
-            <a:off x="499719" y="274320"/>
-            <a:ext cx="11192256" cy="6217920"/>
-          </a:xfrm>
-          <a:prstGeom prst="rect">
-            <a:avLst/>
-          </a:prstGeom>
-        </p:spPr>
-      </p:pic>
-      <p:sp>
-        <p:nvSpPr>
-          <p:cNvPr id="3" name="TextBox 2"/>
-          <p:cNvSpPr txBox="1"/>
-          <p:nvPr/>
-        </p:nvSpPr>
-        <p:spPr>
-          <a:xfrm>
-            <a:off x="365760" y="6309360"/>
-            <a:ext cx="11430000" cy="548640"/>
-          </a:xfrm>
-          <a:prstGeom prst="rect">
-            <a:avLst/>
-          </a:prstGeom>
-          <a:noFill/>
-        </p:spPr>
-        <p:txBody>
-          <a:bodyPr wrap="none">
-            <a:spAutoFit/>
-          </a:bodyPr>
-          <a:lstStyle/>
-          <a:p/>
-          <a:p>
-            <a:pPr>
-              <a:defRPr sz="1200"/>
-            </a:pPr>
-            <a:r>
-              <a:t>商品详情（完整描述） - [演示] 闲鱼 超自然行动组摸金陪 同行 2号</a:t>
-            </a:r>
-          </a:p>
-        </p:txBody>
-      </p:sp>
-    </p:spTree>
-  </p:cSld>
-  <p:clrMapOvr>
-    <a:masterClrMapping/>
-  </p:clrMapOvr>
-</p:sld>
-</file>
-
-<file path=ppt/slides/slide6.xml><?xml version="1.0" encoding="utf-8"?>
-<p:sld xmlns:a="http://schemas.openxmlformats.org/drawingml/2006/main" xmlns:p="http://schemas.openxmlformats.org/presentationml/2006/main" xmlns:r="http://schemas.openxmlformats.org/officeDocument/2006/relationships">
-  <p:cSld>
-    <p:spTree>
-      <p:nvGrpSpPr>
-        <p:cNvPr id="1" name=""/>
-        <p:cNvGrpSpPr/>
-        <p:nvPr/>
-      </p:nvGrpSpPr>
-      <p:grpSpPr/>
-      <p:sp>
-        <p:nvSpPr>
-          <p:cNvPr id="2" name="TextBox 1"/>
-          <p:cNvSpPr txBox="1"/>
-          <p:nvPr/>
-        </p:nvSpPr>
-        <p:spPr>
-          <a:xfrm>
-            <a:off x="548640" y="365760"/>
-            <a:ext cx="11064240" cy="6126480"/>
-          </a:xfrm>
-          <a:prstGeom prst="rect">
-            <a:avLst/>
-          </a:prstGeom>
-          <a:noFill/>
-        </p:spPr>
-        <p:txBody>
-          <a:bodyPr wrap="square">
-            <a:spAutoFit/>
-          </a:bodyPr>
-          <a:lstStyle/>
-          <a:p/>
-          <a:p>
-            <a:pPr>
-              <a:defRPr sz="1800" b="1"/>
-            </a:pPr>
-            <a:r>
-              <a:t>#3  [演示] 闲鱼 超自然行动组摸金陪 同行 3号</a:t>
-            </a:r>
-          </a:p>
-          <a:p>
-            <a:pPr>
-              <a:defRPr sz="1400"/>
-            </a:pPr>
-            <a:r>
-              <a:t>价格：33.0    销量/想要：60人想要</a:t>
-            </a:r>
-          </a:p>
-          <a:p>
-            <a:pPr>
-              <a:defRPr sz="1400"/>
-            </a:pPr>
-            <a:r>
-              <a:t>店铺/卖家：卖家3（演示）    发货地：广东深圳</a:t>
-            </a:r>
-          </a:p>
-          <a:p>
-            <a:pPr>
-              <a:defRPr sz="1400"/>
-            </a:pPr>
-            <a:r>
-              <a:t>SKU：详情页为演示地址或无详情链接</a:t>
-            </a:r>
-          </a:p>
-          <a:p>
-            <a:pPr>
-              <a:defRPr sz="1400"/>
-            </a:pPr>
-            <a:r>
-              <a:t>卖点：待核验</a:t>
-            </a:r>
-          </a:p>
-          <a:p>
-            <a:pPr>
-              <a:defRPr sz="1400"/>
-            </a:pPr>
-            <a:r>
-              <a:t>链接：https://example.invalid/demo/xianyu/3</a:t>
-            </a:r>
-          </a:p>
-        </p:txBody>
-      </p:sp>
-    </p:spTree>
-  </p:cSld>
-  <p:clrMapOvr>
-    <a:masterClrMapping/>
-  </p:clrMapOvr>
-</p:sld>
-</file>
-
-<file path=ppt/slides/slide7.xml><?xml version="1.0" encoding="utf-8"?>
-<p:sld xmlns:a="http://schemas.openxmlformats.org/drawingml/2006/main" xmlns:p="http://schemas.openxmlformats.org/presentationml/2006/main" xmlns:r="http://schemas.openxmlformats.org/officeDocument/2006/relationships">
-  <p:cSld>
-    <p:spTree>
-      <p:nvGrpSpPr>
-        <p:cNvPr id="1" name=""/>
-        <p:cNvGrpSpPr/>
-        <p:nvPr/>
-      </p:nvGrpSpPr>
-      <p:grpSpPr/>
-      <p:pic>
-        <p:nvPicPr>
-          <p:cNvPr id="2" name="Picture 1" descr="详情卡片3.png"/>
-          <p:cNvPicPr>
-            <a:picLocks noChangeAspect="1"/>
-          </p:cNvPicPr>
-          <p:nvPr/>
-        </p:nvPicPr>
-        <p:blipFill>
-          <a:blip r:embed="rId2"/>
-          <a:stretch>
-            <a:fillRect/>
-          </a:stretch>
-        </p:blipFill>
-        <p:spPr>
-          <a:xfrm>
-            <a:off x="499719" y="274320"/>
-            <a:ext cx="11192256" cy="6217920"/>
-          </a:xfrm>
-          <a:prstGeom prst="rect">
-            <a:avLst/>
-          </a:prstGeom>
-        </p:spPr>
-      </p:pic>
-      <p:sp>
-        <p:nvSpPr>
-          <p:cNvPr id="3" name="TextBox 2"/>
-          <p:cNvSpPr txBox="1"/>
-          <p:nvPr/>
-        </p:nvSpPr>
-        <p:spPr>
-          <a:xfrm>
-            <a:off x="365760" y="6309360"/>
-            <a:ext cx="11430000" cy="548640"/>
-          </a:xfrm>
-          <a:prstGeom prst="rect">
-            <a:avLst/>
-          </a:prstGeom>
-          <a:noFill/>
-        </p:spPr>
-        <p:txBody>
-          <a:bodyPr wrap="none">
-            <a:spAutoFit/>
-          </a:bodyPr>
-          <a:lstStyle/>
-          <a:p/>
-          <a:p>
-            <a:pPr>
-              <a:defRPr sz="1200"/>
-            </a:pPr>
-            <a:r>
-              <a:t>商品详情（完整描述） - [演示] 闲鱼 超自然行动组摸金陪 同行 3号</a:t>
-            </a:r>
-          </a:p>
-        </p:txBody>
-      </p:sp>
-    </p:spTree>
-  </p:cSld>
-  <p:clrMapOvr>
-    <a:masterClrMapping/>
-  </p:clrMapOvr>
-</p:sld>
-</file>
-
-<file path=ppt/slides/slide8.xml><?xml version="1.0" encoding="utf-8"?>
-<p:sld xmlns:a="http://schemas.openxmlformats.org/drawingml/2006/main" xmlns:p="http://schemas.openxmlformats.org/presentationml/2006/main" xmlns:r="http://schemas.openxmlformats.org/officeDocument/2006/relationships">
-  <p:cSld>
-    <p:spTree>
-      <p:nvGrpSpPr>
-        <p:cNvPr id="1" name=""/>
-        <p:cNvGrpSpPr/>
-        <p:nvPr/>
-      </p:nvGrpSpPr>
-      <p:grpSpPr/>
-      <p:sp>
-        <p:nvSpPr>
-          <p:cNvPr id="2" name="TextBox 1"/>
-          <p:cNvSpPr txBox="1"/>
-          <p:nvPr/>
-        </p:nvSpPr>
-        <p:spPr>
-          <a:xfrm>
-            <a:off x="548640" y="365760"/>
-            <a:ext cx="11064240" cy="6126480"/>
-          </a:xfrm>
-          <a:prstGeom prst="rect">
-            <a:avLst/>
-          </a:prstGeom>
-          <a:noFill/>
-        </p:spPr>
-        <p:txBody>
-          <a:bodyPr wrap="square">
-            <a:spAutoFit/>
-          </a:bodyPr>
-          <a:lstStyle/>
-          <a:p/>
-          <a:p>
-            <a:pPr>
-              <a:defRPr sz="1800" b="1"/>
-            </a:pPr>
-            <a:r>
-              <a:t>#4  [演示] 闲鱼 超自然行动组 同行 1号</a:t>
-            </a:r>
-          </a:p>
-          <a:p>
-            <a:pPr>
-              <a:defRPr sz="1400"/>
-            </a:pPr>
-            <a:r>
-              <a:t>价格：21.0    销量/想要：20人想要</a:t>
-            </a:r>
-          </a:p>
-          <a:p>
-            <a:pPr>
-              <a:defRPr sz="1400"/>
-            </a:pPr>
-            <a:r>
-              <a:t>店铺/卖家：卖家1（演示）    发货地：广东深圳</a:t>
-            </a:r>
-          </a:p>
-          <a:p>
-            <a:pPr>
-              <a:defRPr sz="1400"/>
-            </a:pPr>
-            <a:r>
-              <a:t>SKU：详情页为演示地址或无详情链接</a:t>
-            </a:r>
-          </a:p>
-          <a:p>
-            <a:pPr>
-              <a:defRPr sz="1400"/>
-            </a:pPr>
-            <a:r>
-              <a:t>卖点：待核验</a:t>
-            </a:r>
-          </a:p>
-          <a:p>
-            <a:pPr>
-              <a:defRPr sz="1400"/>
-            </a:pPr>
-            <a:r>
-              <a:t>链接：https://example.invalid/demo/xianyu/4</a:t>
-            </a:r>
-          </a:p>
-        </p:txBody>
-      </p:sp>
-    </p:spTree>
-  </p:cSld>
-  <p:clrMapOvr>
-    <a:masterClrMapping/>
-  </p:clrMapOvr>
-</p:sld>
-</file>
-
-<file path=ppt/slides/slide9.xml><?xml version="1.0" encoding="utf-8"?>
-<p:sld xmlns:a="http://schemas.openxmlformats.org/drawingml/2006/main" xmlns:p="http://schemas.openxmlformats.org/presentationml/2006/main" xmlns:r="http://schemas.openxmlformats.org/officeDocument/2006/relationships">
-  <p:cSld>
-    <p:spTree>
-      <p:nvGrpSpPr>
-        <p:cNvPr id="1" name=""/>
-        <p:cNvGrpSpPr/>
-        <p:nvPr/>
-      </p:nvGrpSpPr>
-      <p:grpSpPr/>
-      <p:pic>
-        <p:nvPicPr>
-          <p:cNvPr id="2" name="Picture 1" descr="详情卡片4.png"/>
-          <p:cNvPicPr>
-            <a:picLocks noChangeAspect="1"/>
-          </p:cNvPicPr>
-          <p:nvPr/>
-        </p:nvPicPr>
-        <p:blipFill>
-          <a:blip r:embed="rId2"/>
-          <a:stretch>
-            <a:fillRect/>
-          </a:stretch>
-        </p:blipFill>
-        <p:spPr>
-          <a:xfrm>
-            <a:off x="499719" y="274320"/>
-            <a:ext cx="11192256" cy="6217920"/>
-          </a:xfrm>
-          <a:prstGeom prst="rect">
-            <a:avLst/>
-          </a:prstGeom>
-        </p:spPr>
-      </p:pic>
-      <p:sp>
-        <p:nvSpPr>
-          <p:cNvPr id="3" name="TextBox 2"/>
-          <p:cNvSpPr txBox="1"/>
-          <p:nvPr/>
-        </p:nvSpPr>
-        <p:spPr>
-          <a:xfrm>
-            <a:off x="365760" y="6309360"/>
-            <a:ext cx="11430000" cy="548640"/>
-          </a:xfrm>
-          <a:prstGeom prst="rect">
-            <a:avLst/>
-          </a:prstGeom>
-          <a:noFill/>
-        </p:spPr>
-        <p:txBody>
-          <a:bodyPr wrap="none">
-            <a:spAutoFit/>
-          </a:bodyPr>
-          <a:lstStyle/>
-          <a:p/>
-          <a:p>
-            <a:pPr>
-              <a:defRPr sz="1200"/>
-            </a:pPr>
-            <a:r>
-              <a:t>商品详情（完整描述） - [演示] 闲鱼 超自然行动组 同行 1号</a:t>
+              <a:t>2026-09-30  ·  0 个商品</a:t>
             </a:r>
           </a:p>
         </p:txBody>

--- a/archive/2026-09-30/xianyu/PPT报告/闲鱼同行爆款分析-2026-09-30.pptx
+++ b/archive/2026-09-30/xianyu/PPT报告/闲鱼同行爆款分析-2026-09-30.pptx
@@ -6,6 +6,26 @@
   </p:sldMasterIdLst>
   <p:sldIdLst>
     <p:sldId id="256" r:id="rId7"/>
+    <p:sldId id="257" r:id="rId8"/>
+    <p:sldId id="258" r:id="rId9"/>
+    <p:sldId id="259" r:id="rId10"/>
+    <p:sldId id="260" r:id="rId11"/>
+    <p:sldId id="261" r:id="rId12"/>
+    <p:sldId id="262" r:id="rId13"/>
+    <p:sldId id="263" r:id="rId14"/>
+    <p:sldId id="264" r:id="rId15"/>
+    <p:sldId id="265" r:id="rId16"/>
+    <p:sldId id="266" r:id="rId17"/>
+    <p:sldId id="267" r:id="rId18"/>
+    <p:sldId id="268" r:id="rId19"/>
+    <p:sldId id="269" r:id="rId20"/>
+    <p:sldId id="270" r:id="rId21"/>
+    <p:sldId id="271" r:id="rId22"/>
+    <p:sldId id="272" r:id="rId23"/>
+    <p:sldId id="273" r:id="rId24"/>
+    <p:sldId id="274" r:id="rId25"/>
+    <p:sldId id="275" r:id="rId26"/>
+    <p:sldId id="276" r:id="rId27"/>
   </p:sldIdLst>
   <p:sldSz cx="12191695" cy="6858000" type="screen4x3"/>
   <p:notesSz cx="6858000" cy="9144000"/>
@@ -3123,7 +3143,1683 @@
               <a:defRPr sz="1800"/>
             </a:pPr>
             <a:r>
-              <a:t>2026-09-30  ·  0 个商品</a:t>
+              <a:t>2026-09-30  ·  10 个商品</a:t>
+            </a:r>
+          </a:p>
+        </p:txBody>
+      </p:sp>
+      <p:sp>
+        <p:nvSpPr>
+          <p:cNvPr id="3" name="TextBox 2"/>
+          <p:cNvSpPr txBox="1"/>
+          <p:nvPr/>
+        </p:nvSpPr>
+        <p:spPr>
+          <a:xfrm>
+            <a:off x="731520" y="4206240"/>
+            <a:ext cx="10698480" cy="548640"/>
+          </a:xfrm>
+          <a:prstGeom prst="rect">
+            <a:avLst/>
+          </a:prstGeom>
+          <a:noFill/>
+        </p:spPr>
+        <p:txBody>
+          <a:bodyPr wrap="none">
+            <a:spAutoFit/>
+          </a:bodyPr>
+          <a:lstStyle/>
+          <a:p/>
+          <a:p>
+            <a:pPr>
+              <a:defRPr sz="1400">
+                <a:solidFill>
+                  <a:srgbClr val="C06040"/>
+                </a:solidFill>
+              </a:defRPr>
+            </a:pPr>
+            <a:r>
+              <a:t>* 本页为【演示数据】，仅用于验证链路</a:t>
+            </a:r>
+          </a:p>
+        </p:txBody>
+      </p:sp>
+    </p:spTree>
+  </p:cSld>
+  <p:clrMapOvr>
+    <a:masterClrMapping/>
+  </p:clrMapOvr>
+</p:sld>
+</file>
+
+<file path=ppt/slides/slide10.xml><?xml version="1.0" encoding="utf-8"?>
+<p:sld xmlns:a="http://schemas.openxmlformats.org/drawingml/2006/main" xmlns:p="http://schemas.openxmlformats.org/presentationml/2006/main" xmlns:r="http://schemas.openxmlformats.org/officeDocument/2006/relationships">
+  <p:cSld>
+    <p:spTree>
+      <p:nvGrpSpPr>
+        <p:cNvPr id="1" name=""/>
+        <p:cNvGrpSpPr/>
+        <p:nvPr/>
+      </p:nvGrpSpPr>
+      <p:grpSpPr/>
+      <p:sp>
+        <p:nvSpPr>
+          <p:cNvPr id="2" name="TextBox 1"/>
+          <p:cNvSpPr txBox="1"/>
+          <p:nvPr/>
+        </p:nvSpPr>
+        <p:spPr>
+          <a:xfrm>
+            <a:off x="548640" y="365760"/>
+            <a:ext cx="11064240" cy="6126480"/>
+          </a:xfrm>
+          <a:prstGeom prst="rect">
+            <a:avLst/>
+          </a:prstGeom>
+          <a:noFill/>
+        </p:spPr>
+        <p:txBody>
+          <a:bodyPr wrap="square">
+            <a:spAutoFit/>
+          </a:bodyPr>
+          <a:lstStyle/>
+          <a:p/>
+          <a:p>
+            <a:pPr>
+              <a:defRPr sz="1800" b="1"/>
+            </a:pPr>
+            <a:r>
+              <a:t>#5  [演示] 闲鱼 超自然行动组 同行 2号</a:t>
+            </a:r>
+          </a:p>
+          <a:p>
+            <a:pPr>
+              <a:defRPr sz="1400"/>
+            </a:pPr>
+            <a:r>
+              <a:t>价格：27.0    销量/想要：40人想要</a:t>
+            </a:r>
+          </a:p>
+          <a:p>
+            <a:pPr>
+              <a:defRPr sz="1400"/>
+            </a:pPr>
+            <a:r>
+              <a:t>店铺/卖家：卖家2（演示）    发货地：广东深圳</a:t>
+            </a:r>
+          </a:p>
+          <a:p>
+            <a:pPr>
+              <a:defRPr sz="1400"/>
+            </a:pPr>
+            <a:r>
+              <a:t>SKU：详情页为演示地址或无详情链接</a:t>
+            </a:r>
+          </a:p>
+          <a:p>
+            <a:pPr>
+              <a:defRPr sz="1400"/>
+            </a:pPr>
+            <a:r>
+              <a:t>卖点：待核验</a:t>
+            </a:r>
+          </a:p>
+          <a:p>
+            <a:pPr>
+              <a:defRPr sz="1400"/>
+            </a:pPr>
+            <a:r>
+              <a:t>链接：https://example.invalid/demo/xianyu/5</a:t>
+            </a:r>
+          </a:p>
+        </p:txBody>
+      </p:sp>
+    </p:spTree>
+  </p:cSld>
+  <p:clrMapOvr>
+    <a:masterClrMapping/>
+  </p:clrMapOvr>
+</p:sld>
+</file>
+
+<file path=ppt/slides/slide11.xml><?xml version="1.0" encoding="utf-8"?>
+<p:sld xmlns:a="http://schemas.openxmlformats.org/drawingml/2006/main" xmlns:p="http://schemas.openxmlformats.org/presentationml/2006/main" xmlns:r="http://schemas.openxmlformats.org/officeDocument/2006/relationships">
+  <p:cSld>
+    <p:spTree>
+      <p:nvGrpSpPr>
+        <p:cNvPr id="1" name=""/>
+        <p:cNvGrpSpPr/>
+        <p:nvPr/>
+      </p:nvGrpSpPr>
+      <p:grpSpPr/>
+      <p:pic>
+        <p:nvPicPr>
+          <p:cNvPr id="2" name="Picture 1" descr="详情卡片5.png"/>
+          <p:cNvPicPr>
+            <a:picLocks noChangeAspect="1"/>
+          </p:cNvPicPr>
+          <p:nvPr/>
+        </p:nvPicPr>
+        <p:blipFill>
+          <a:blip r:embed="rId2"/>
+          <a:stretch>
+            <a:fillRect/>
+          </a:stretch>
+        </p:blipFill>
+        <p:spPr>
+          <a:xfrm>
+            <a:off x="499719" y="274320"/>
+            <a:ext cx="11192256" cy="6217920"/>
+          </a:xfrm>
+          <a:prstGeom prst="rect">
+            <a:avLst/>
+          </a:prstGeom>
+        </p:spPr>
+      </p:pic>
+      <p:sp>
+        <p:nvSpPr>
+          <p:cNvPr id="3" name="TextBox 2"/>
+          <p:cNvSpPr txBox="1"/>
+          <p:nvPr/>
+        </p:nvSpPr>
+        <p:spPr>
+          <a:xfrm>
+            <a:off x="365760" y="6309360"/>
+            <a:ext cx="11430000" cy="548640"/>
+          </a:xfrm>
+          <a:prstGeom prst="rect">
+            <a:avLst/>
+          </a:prstGeom>
+          <a:noFill/>
+        </p:spPr>
+        <p:txBody>
+          <a:bodyPr wrap="none">
+            <a:spAutoFit/>
+          </a:bodyPr>
+          <a:lstStyle/>
+          <a:p/>
+          <a:p>
+            <a:pPr>
+              <a:defRPr sz="1200"/>
+            </a:pPr>
+            <a:r>
+              <a:t>商品详情（完整描述） - [演示] 闲鱼 超自然行动组 同行 2号</a:t>
+            </a:r>
+          </a:p>
+        </p:txBody>
+      </p:sp>
+    </p:spTree>
+  </p:cSld>
+  <p:clrMapOvr>
+    <a:masterClrMapping/>
+  </p:clrMapOvr>
+</p:sld>
+</file>
+
+<file path=ppt/slides/slide12.xml><?xml version="1.0" encoding="utf-8"?>
+<p:sld xmlns:a="http://schemas.openxmlformats.org/drawingml/2006/main" xmlns:p="http://schemas.openxmlformats.org/presentationml/2006/main" xmlns:r="http://schemas.openxmlformats.org/officeDocument/2006/relationships">
+  <p:cSld>
+    <p:spTree>
+      <p:nvGrpSpPr>
+        <p:cNvPr id="1" name=""/>
+        <p:cNvGrpSpPr/>
+        <p:nvPr/>
+      </p:nvGrpSpPr>
+      <p:grpSpPr/>
+      <p:sp>
+        <p:nvSpPr>
+          <p:cNvPr id="2" name="TextBox 1"/>
+          <p:cNvSpPr txBox="1"/>
+          <p:nvPr/>
+        </p:nvSpPr>
+        <p:spPr>
+          <a:xfrm>
+            <a:off x="548640" y="365760"/>
+            <a:ext cx="11064240" cy="6126480"/>
+          </a:xfrm>
+          <a:prstGeom prst="rect">
+            <a:avLst/>
+          </a:prstGeom>
+          <a:noFill/>
+        </p:spPr>
+        <p:txBody>
+          <a:bodyPr wrap="square">
+            <a:spAutoFit/>
+          </a:bodyPr>
+          <a:lstStyle/>
+          <a:p/>
+          <a:p>
+            <a:pPr>
+              <a:defRPr sz="1800" b="1"/>
+            </a:pPr>
+            <a:r>
+              <a:t>#6  [演示] 闲鱼 超自然行动组 同行 3号</a:t>
+            </a:r>
+          </a:p>
+          <a:p>
+            <a:pPr>
+              <a:defRPr sz="1400"/>
+            </a:pPr>
+            <a:r>
+              <a:t>价格：33.0    销量/想要：60人想要</a:t>
+            </a:r>
+          </a:p>
+          <a:p>
+            <a:pPr>
+              <a:defRPr sz="1400"/>
+            </a:pPr>
+            <a:r>
+              <a:t>店铺/卖家：卖家3（演示）    发货地：广东深圳</a:t>
+            </a:r>
+          </a:p>
+          <a:p>
+            <a:pPr>
+              <a:defRPr sz="1400"/>
+            </a:pPr>
+            <a:r>
+              <a:t>SKU：详情页为演示地址或无详情链接</a:t>
+            </a:r>
+          </a:p>
+          <a:p>
+            <a:pPr>
+              <a:defRPr sz="1400"/>
+            </a:pPr>
+            <a:r>
+              <a:t>卖点：待核验</a:t>
+            </a:r>
+          </a:p>
+          <a:p>
+            <a:pPr>
+              <a:defRPr sz="1400"/>
+            </a:pPr>
+            <a:r>
+              <a:t>链接：https://example.invalid/demo/xianyu/6</a:t>
+            </a:r>
+          </a:p>
+        </p:txBody>
+      </p:sp>
+    </p:spTree>
+  </p:cSld>
+  <p:clrMapOvr>
+    <a:masterClrMapping/>
+  </p:clrMapOvr>
+</p:sld>
+</file>
+
+<file path=ppt/slides/slide13.xml><?xml version="1.0" encoding="utf-8"?>
+<p:sld xmlns:a="http://schemas.openxmlformats.org/drawingml/2006/main" xmlns:p="http://schemas.openxmlformats.org/presentationml/2006/main" xmlns:r="http://schemas.openxmlformats.org/officeDocument/2006/relationships">
+  <p:cSld>
+    <p:spTree>
+      <p:nvGrpSpPr>
+        <p:cNvPr id="1" name=""/>
+        <p:cNvGrpSpPr/>
+        <p:nvPr/>
+      </p:nvGrpSpPr>
+      <p:grpSpPr/>
+      <p:pic>
+        <p:nvPicPr>
+          <p:cNvPr id="2" name="Picture 1" descr="详情卡片6.png"/>
+          <p:cNvPicPr>
+            <a:picLocks noChangeAspect="1"/>
+          </p:cNvPicPr>
+          <p:nvPr/>
+        </p:nvPicPr>
+        <p:blipFill>
+          <a:blip r:embed="rId2"/>
+          <a:stretch>
+            <a:fillRect/>
+          </a:stretch>
+        </p:blipFill>
+        <p:spPr>
+          <a:xfrm>
+            <a:off x="499719" y="274320"/>
+            <a:ext cx="11192256" cy="6217920"/>
+          </a:xfrm>
+          <a:prstGeom prst="rect">
+            <a:avLst/>
+          </a:prstGeom>
+        </p:spPr>
+      </p:pic>
+      <p:sp>
+        <p:nvSpPr>
+          <p:cNvPr id="3" name="TextBox 2"/>
+          <p:cNvSpPr txBox="1"/>
+          <p:nvPr/>
+        </p:nvSpPr>
+        <p:spPr>
+          <a:xfrm>
+            <a:off x="365760" y="6309360"/>
+            <a:ext cx="11430000" cy="548640"/>
+          </a:xfrm>
+          <a:prstGeom prst="rect">
+            <a:avLst/>
+          </a:prstGeom>
+          <a:noFill/>
+        </p:spPr>
+        <p:txBody>
+          <a:bodyPr wrap="none">
+            <a:spAutoFit/>
+          </a:bodyPr>
+          <a:lstStyle/>
+          <a:p/>
+          <a:p>
+            <a:pPr>
+              <a:defRPr sz="1200"/>
+            </a:pPr>
+            <a:r>
+              <a:t>商品详情（完整描述） - [演示] 闲鱼 超自然行动组 同行 3号</a:t>
+            </a:r>
+          </a:p>
+        </p:txBody>
+      </p:sp>
+    </p:spTree>
+  </p:cSld>
+  <p:clrMapOvr>
+    <a:masterClrMapping/>
+  </p:clrMapOvr>
+</p:sld>
+</file>
+
+<file path=ppt/slides/slide14.xml><?xml version="1.0" encoding="utf-8"?>
+<p:sld xmlns:a="http://schemas.openxmlformats.org/drawingml/2006/main" xmlns:p="http://schemas.openxmlformats.org/presentationml/2006/main" xmlns:r="http://schemas.openxmlformats.org/officeDocument/2006/relationships">
+  <p:cSld>
+    <p:spTree>
+      <p:nvGrpSpPr>
+        <p:cNvPr id="1" name=""/>
+        <p:cNvGrpSpPr/>
+        <p:nvPr/>
+      </p:nvGrpSpPr>
+      <p:grpSpPr/>
+      <p:sp>
+        <p:nvSpPr>
+          <p:cNvPr id="2" name="TextBox 1"/>
+          <p:cNvSpPr txBox="1"/>
+          <p:nvPr/>
+        </p:nvSpPr>
+        <p:spPr>
+          <a:xfrm>
+            <a:off x="548640" y="365760"/>
+            <a:ext cx="11064240" cy="6126480"/>
+          </a:xfrm>
+          <a:prstGeom prst="rect">
+            <a:avLst/>
+          </a:prstGeom>
+          <a:noFill/>
+        </p:spPr>
+        <p:txBody>
+          <a:bodyPr wrap="square">
+            <a:spAutoFit/>
+          </a:bodyPr>
+          <a:lstStyle/>
+          <a:p/>
+          <a:p>
+            <a:pPr>
+              <a:defRPr sz="1800" b="1"/>
+            </a:pPr>
+            <a:r>
+              <a:t>#7  [演示] 闲鱼 摸金陪玩 同行 1号</a:t>
+            </a:r>
+          </a:p>
+          <a:p>
+            <a:pPr>
+              <a:defRPr sz="1400"/>
+            </a:pPr>
+            <a:r>
+              <a:t>价格：21.0    销量/想要：20人想要</a:t>
+            </a:r>
+          </a:p>
+          <a:p>
+            <a:pPr>
+              <a:defRPr sz="1400"/>
+            </a:pPr>
+            <a:r>
+              <a:t>店铺/卖家：卖家1（演示）    发货地：广东深圳</a:t>
+            </a:r>
+          </a:p>
+          <a:p>
+            <a:pPr>
+              <a:defRPr sz="1400"/>
+            </a:pPr>
+            <a:r>
+              <a:t>SKU：详情页为演示地址或无详情链接</a:t>
+            </a:r>
+          </a:p>
+          <a:p>
+            <a:pPr>
+              <a:defRPr sz="1400"/>
+            </a:pPr>
+            <a:r>
+              <a:t>卖点：待核验</a:t>
+            </a:r>
+          </a:p>
+          <a:p>
+            <a:pPr>
+              <a:defRPr sz="1400"/>
+            </a:pPr>
+            <a:r>
+              <a:t>链接：https://example.invalid/demo/xianyu/7</a:t>
+            </a:r>
+          </a:p>
+        </p:txBody>
+      </p:sp>
+    </p:spTree>
+  </p:cSld>
+  <p:clrMapOvr>
+    <a:masterClrMapping/>
+  </p:clrMapOvr>
+</p:sld>
+</file>
+
+<file path=ppt/slides/slide15.xml><?xml version="1.0" encoding="utf-8"?>
+<p:sld xmlns:a="http://schemas.openxmlformats.org/drawingml/2006/main" xmlns:p="http://schemas.openxmlformats.org/presentationml/2006/main" xmlns:r="http://schemas.openxmlformats.org/officeDocument/2006/relationships">
+  <p:cSld>
+    <p:spTree>
+      <p:nvGrpSpPr>
+        <p:cNvPr id="1" name=""/>
+        <p:cNvGrpSpPr/>
+        <p:nvPr/>
+      </p:nvGrpSpPr>
+      <p:grpSpPr/>
+      <p:pic>
+        <p:nvPicPr>
+          <p:cNvPr id="2" name="Picture 1" descr="详情卡片7.png"/>
+          <p:cNvPicPr>
+            <a:picLocks noChangeAspect="1"/>
+          </p:cNvPicPr>
+          <p:nvPr/>
+        </p:nvPicPr>
+        <p:blipFill>
+          <a:blip r:embed="rId2"/>
+          <a:stretch>
+            <a:fillRect/>
+          </a:stretch>
+        </p:blipFill>
+        <p:spPr>
+          <a:xfrm>
+            <a:off x="499719" y="274320"/>
+            <a:ext cx="11192256" cy="6217920"/>
+          </a:xfrm>
+          <a:prstGeom prst="rect">
+            <a:avLst/>
+          </a:prstGeom>
+        </p:spPr>
+      </p:pic>
+      <p:sp>
+        <p:nvSpPr>
+          <p:cNvPr id="3" name="TextBox 2"/>
+          <p:cNvSpPr txBox="1"/>
+          <p:nvPr/>
+        </p:nvSpPr>
+        <p:spPr>
+          <a:xfrm>
+            <a:off x="365760" y="6309360"/>
+            <a:ext cx="11430000" cy="548640"/>
+          </a:xfrm>
+          <a:prstGeom prst="rect">
+            <a:avLst/>
+          </a:prstGeom>
+          <a:noFill/>
+        </p:spPr>
+        <p:txBody>
+          <a:bodyPr wrap="none">
+            <a:spAutoFit/>
+          </a:bodyPr>
+          <a:lstStyle/>
+          <a:p/>
+          <a:p>
+            <a:pPr>
+              <a:defRPr sz="1200"/>
+            </a:pPr>
+            <a:r>
+              <a:t>商品详情（完整描述） - [演示] 闲鱼 摸金陪玩 同行 1号</a:t>
+            </a:r>
+          </a:p>
+        </p:txBody>
+      </p:sp>
+    </p:spTree>
+  </p:cSld>
+  <p:clrMapOvr>
+    <a:masterClrMapping/>
+  </p:clrMapOvr>
+</p:sld>
+</file>
+
+<file path=ppt/slides/slide16.xml><?xml version="1.0" encoding="utf-8"?>
+<p:sld xmlns:a="http://schemas.openxmlformats.org/drawingml/2006/main" xmlns:p="http://schemas.openxmlformats.org/presentationml/2006/main" xmlns:r="http://schemas.openxmlformats.org/officeDocument/2006/relationships">
+  <p:cSld>
+    <p:spTree>
+      <p:nvGrpSpPr>
+        <p:cNvPr id="1" name=""/>
+        <p:cNvGrpSpPr/>
+        <p:nvPr/>
+      </p:nvGrpSpPr>
+      <p:grpSpPr/>
+      <p:sp>
+        <p:nvSpPr>
+          <p:cNvPr id="2" name="TextBox 1"/>
+          <p:cNvSpPr txBox="1"/>
+          <p:nvPr/>
+        </p:nvSpPr>
+        <p:spPr>
+          <a:xfrm>
+            <a:off x="548640" y="365760"/>
+            <a:ext cx="11064240" cy="6126480"/>
+          </a:xfrm>
+          <a:prstGeom prst="rect">
+            <a:avLst/>
+          </a:prstGeom>
+          <a:noFill/>
+        </p:spPr>
+        <p:txBody>
+          <a:bodyPr wrap="square">
+            <a:spAutoFit/>
+          </a:bodyPr>
+          <a:lstStyle/>
+          <a:p/>
+          <a:p>
+            <a:pPr>
+              <a:defRPr sz="1800" b="1"/>
+            </a:pPr>
+            <a:r>
+              <a:t>#8  [演示] 闲鱼 摸金陪玩 同行 2号</a:t>
+            </a:r>
+          </a:p>
+          <a:p>
+            <a:pPr>
+              <a:defRPr sz="1400"/>
+            </a:pPr>
+            <a:r>
+              <a:t>价格：27.0    销量/想要：40人想要</a:t>
+            </a:r>
+          </a:p>
+          <a:p>
+            <a:pPr>
+              <a:defRPr sz="1400"/>
+            </a:pPr>
+            <a:r>
+              <a:t>店铺/卖家：卖家2（演示）    发货地：广东深圳</a:t>
+            </a:r>
+          </a:p>
+          <a:p>
+            <a:pPr>
+              <a:defRPr sz="1400"/>
+            </a:pPr>
+            <a:r>
+              <a:t>SKU：详情页为演示地址或无详情链接</a:t>
+            </a:r>
+          </a:p>
+          <a:p>
+            <a:pPr>
+              <a:defRPr sz="1400"/>
+            </a:pPr>
+            <a:r>
+              <a:t>卖点：待核验</a:t>
+            </a:r>
+          </a:p>
+          <a:p>
+            <a:pPr>
+              <a:defRPr sz="1400"/>
+            </a:pPr>
+            <a:r>
+              <a:t>链接：https://example.invalid/demo/xianyu/8</a:t>
+            </a:r>
+          </a:p>
+        </p:txBody>
+      </p:sp>
+    </p:spTree>
+  </p:cSld>
+  <p:clrMapOvr>
+    <a:masterClrMapping/>
+  </p:clrMapOvr>
+</p:sld>
+</file>
+
+<file path=ppt/slides/slide17.xml><?xml version="1.0" encoding="utf-8"?>
+<p:sld xmlns:a="http://schemas.openxmlformats.org/drawingml/2006/main" xmlns:p="http://schemas.openxmlformats.org/presentationml/2006/main" xmlns:r="http://schemas.openxmlformats.org/officeDocument/2006/relationships">
+  <p:cSld>
+    <p:spTree>
+      <p:nvGrpSpPr>
+        <p:cNvPr id="1" name=""/>
+        <p:cNvGrpSpPr/>
+        <p:nvPr/>
+      </p:nvGrpSpPr>
+      <p:grpSpPr/>
+      <p:pic>
+        <p:nvPicPr>
+          <p:cNvPr id="2" name="Picture 1" descr="详情卡片8.png"/>
+          <p:cNvPicPr>
+            <a:picLocks noChangeAspect="1"/>
+          </p:cNvPicPr>
+          <p:nvPr/>
+        </p:nvPicPr>
+        <p:blipFill>
+          <a:blip r:embed="rId2"/>
+          <a:stretch>
+            <a:fillRect/>
+          </a:stretch>
+        </p:blipFill>
+        <p:spPr>
+          <a:xfrm>
+            <a:off x="499719" y="274320"/>
+            <a:ext cx="11192256" cy="6217920"/>
+          </a:xfrm>
+          <a:prstGeom prst="rect">
+            <a:avLst/>
+          </a:prstGeom>
+        </p:spPr>
+      </p:pic>
+      <p:sp>
+        <p:nvSpPr>
+          <p:cNvPr id="3" name="TextBox 2"/>
+          <p:cNvSpPr txBox="1"/>
+          <p:nvPr/>
+        </p:nvSpPr>
+        <p:spPr>
+          <a:xfrm>
+            <a:off x="365760" y="6309360"/>
+            <a:ext cx="11430000" cy="548640"/>
+          </a:xfrm>
+          <a:prstGeom prst="rect">
+            <a:avLst/>
+          </a:prstGeom>
+          <a:noFill/>
+        </p:spPr>
+        <p:txBody>
+          <a:bodyPr wrap="none">
+            <a:spAutoFit/>
+          </a:bodyPr>
+          <a:lstStyle/>
+          <a:p/>
+          <a:p>
+            <a:pPr>
+              <a:defRPr sz="1200"/>
+            </a:pPr>
+            <a:r>
+              <a:t>商品详情（完整描述） - [演示] 闲鱼 摸金陪玩 同行 2号</a:t>
+            </a:r>
+          </a:p>
+        </p:txBody>
+      </p:sp>
+    </p:spTree>
+  </p:cSld>
+  <p:clrMapOvr>
+    <a:masterClrMapping/>
+  </p:clrMapOvr>
+</p:sld>
+</file>
+
+<file path=ppt/slides/slide18.xml><?xml version="1.0" encoding="utf-8"?>
+<p:sld xmlns:a="http://schemas.openxmlformats.org/drawingml/2006/main" xmlns:p="http://schemas.openxmlformats.org/presentationml/2006/main" xmlns:r="http://schemas.openxmlformats.org/officeDocument/2006/relationships">
+  <p:cSld>
+    <p:spTree>
+      <p:nvGrpSpPr>
+        <p:cNvPr id="1" name=""/>
+        <p:cNvGrpSpPr/>
+        <p:nvPr/>
+      </p:nvGrpSpPr>
+      <p:grpSpPr/>
+      <p:sp>
+        <p:nvSpPr>
+          <p:cNvPr id="2" name="TextBox 1"/>
+          <p:cNvSpPr txBox="1"/>
+          <p:nvPr/>
+        </p:nvSpPr>
+        <p:spPr>
+          <a:xfrm>
+            <a:off x="548640" y="365760"/>
+            <a:ext cx="11064240" cy="6126480"/>
+          </a:xfrm>
+          <a:prstGeom prst="rect">
+            <a:avLst/>
+          </a:prstGeom>
+          <a:noFill/>
+        </p:spPr>
+        <p:txBody>
+          <a:bodyPr wrap="square">
+            <a:spAutoFit/>
+          </a:bodyPr>
+          <a:lstStyle/>
+          <a:p/>
+          <a:p>
+            <a:pPr>
+              <a:defRPr sz="1800" b="1"/>
+            </a:pPr>
+            <a:r>
+              <a:t>#9  [演示] 闲鱼 摸金陪玩 同行 3号</a:t>
+            </a:r>
+          </a:p>
+          <a:p>
+            <a:pPr>
+              <a:defRPr sz="1400"/>
+            </a:pPr>
+            <a:r>
+              <a:t>价格：33.0    销量/想要：60人想要</a:t>
+            </a:r>
+          </a:p>
+          <a:p>
+            <a:pPr>
+              <a:defRPr sz="1400"/>
+            </a:pPr>
+            <a:r>
+              <a:t>店铺/卖家：卖家3（演示）    发货地：广东深圳</a:t>
+            </a:r>
+          </a:p>
+          <a:p>
+            <a:pPr>
+              <a:defRPr sz="1400"/>
+            </a:pPr>
+            <a:r>
+              <a:t>SKU：详情页为演示地址或无详情链接</a:t>
+            </a:r>
+          </a:p>
+          <a:p>
+            <a:pPr>
+              <a:defRPr sz="1400"/>
+            </a:pPr>
+            <a:r>
+              <a:t>卖点：待核验</a:t>
+            </a:r>
+          </a:p>
+          <a:p>
+            <a:pPr>
+              <a:defRPr sz="1400"/>
+            </a:pPr>
+            <a:r>
+              <a:t>链接：https://example.invalid/demo/xianyu/9</a:t>
+            </a:r>
+          </a:p>
+        </p:txBody>
+      </p:sp>
+    </p:spTree>
+  </p:cSld>
+  <p:clrMapOvr>
+    <a:masterClrMapping/>
+  </p:clrMapOvr>
+</p:sld>
+</file>
+
+<file path=ppt/slides/slide19.xml><?xml version="1.0" encoding="utf-8"?>
+<p:sld xmlns:a="http://schemas.openxmlformats.org/drawingml/2006/main" xmlns:p="http://schemas.openxmlformats.org/presentationml/2006/main" xmlns:r="http://schemas.openxmlformats.org/officeDocument/2006/relationships">
+  <p:cSld>
+    <p:spTree>
+      <p:nvGrpSpPr>
+        <p:cNvPr id="1" name=""/>
+        <p:cNvGrpSpPr/>
+        <p:nvPr/>
+      </p:nvGrpSpPr>
+      <p:grpSpPr/>
+      <p:pic>
+        <p:nvPicPr>
+          <p:cNvPr id="2" name="Picture 1" descr="详情卡片9.png"/>
+          <p:cNvPicPr>
+            <a:picLocks noChangeAspect="1"/>
+          </p:cNvPicPr>
+          <p:nvPr/>
+        </p:nvPicPr>
+        <p:blipFill>
+          <a:blip r:embed="rId2"/>
+          <a:stretch>
+            <a:fillRect/>
+          </a:stretch>
+        </p:blipFill>
+        <p:spPr>
+          <a:xfrm>
+            <a:off x="499719" y="274320"/>
+            <a:ext cx="11192256" cy="6217920"/>
+          </a:xfrm>
+          <a:prstGeom prst="rect">
+            <a:avLst/>
+          </a:prstGeom>
+        </p:spPr>
+      </p:pic>
+      <p:sp>
+        <p:nvSpPr>
+          <p:cNvPr id="3" name="TextBox 2"/>
+          <p:cNvSpPr txBox="1"/>
+          <p:nvPr/>
+        </p:nvSpPr>
+        <p:spPr>
+          <a:xfrm>
+            <a:off x="365760" y="6309360"/>
+            <a:ext cx="11430000" cy="548640"/>
+          </a:xfrm>
+          <a:prstGeom prst="rect">
+            <a:avLst/>
+          </a:prstGeom>
+          <a:noFill/>
+        </p:spPr>
+        <p:txBody>
+          <a:bodyPr wrap="none">
+            <a:spAutoFit/>
+          </a:bodyPr>
+          <a:lstStyle/>
+          <a:p/>
+          <a:p>
+            <a:pPr>
+              <a:defRPr sz="1200"/>
+            </a:pPr>
+            <a:r>
+              <a:t>商品详情（完整描述） - [演示] 闲鱼 摸金陪玩 同行 3号</a:t>
+            </a:r>
+          </a:p>
+        </p:txBody>
+      </p:sp>
+    </p:spTree>
+  </p:cSld>
+  <p:clrMapOvr>
+    <a:masterClrMapping/>
+  </p:clrMapOvr>
+</p:sld>
+</file>
+
+<file path=ppt/slides/slide2.xml><?xml version="1.0" encoding="utf-8"?>
+<p:sld xmlns:a="http://schemas.openxmlformats.org/drawingml/2006/main" xmlns:p="http://schemas.openxmlformats.org/presentationml/2006/main" xmlns:r="http://schemas.openxmlformats.org/officeDocument/2006/relationships">
+  <p:cSld>
+    <p:spTree>
+      <p:nvGrpSpPr>
+        <p:cNvPr id="1" name=""/>
+        <p:cNvGrpSpPr/>
+        <p:nvPr/>
+      </p:nvGrpSpPr>
+      <p:grpSpPr/>
+      <p:sp>
+        <p:nvSpPr>
+          <p:cNvPr id="2" name="TextBox 1"/>
+          <p:cNvSpPr txBox="1"/>
+          <p:nvPr/>
+        </p:nvSpPr>
+        <p:spPr>
+          <a:xfrm>
+            <a:off x="548640" y="365760"/>
+            <a:ext cx="11064240" cy="6126480"/>
+          </a:xfrm>
+          <a:prstGeom prst="rect">
+            <a:avLst/>
+          </a:prstGeom>
+          <a:noFill/>
+        </p:spPr>
+        <p:txBody>
+          <a:bodyPr wrap="square">
+            <a:spAutoFit/>
+          </a:bodyPr>
+          <a:lstStyle/>
+          <a:p/>
+          <a:p>
+            <a:pPr>
+              <a:defRPr sz="1800" b="1"/>
+            </a:pPr>
+            <a:r>
+              <a:t>#1  [演示] 闲鱼 超自然行动组摸金陪 同行 1号</a:t>
+            </a:r>
+          </a:p>
+          <a:p>
+            <a:pPr>
+              <a:defRPr sz="1400"/>
+            </a:pPr>
+            <a:r>
+              <a:t>价格：21.0    销量/想要：20人想要</a:t>
+            </a:r>
+          </a:p>
+          <a:p>
+            <a:pPr>
+              <a:defRPr sz="1400"/>
+            </a:pPr>
+            <a:r>
+              <a:t>店铺/卖家：卖家1（演示）    发货地：广东深圳</a:t>
+            </a:r>
+          </a:p>
+          <a:p>
+            <a:pPr>
+              <a:defRPr sz="1400"/>
+            </a:pPr>
+            <a:r>
+              <a:t>SKU：详情页为演示地址或无详情链接</a:t>
+            </a:r>
+          </a:p>
+          <a:p>
+            <a:pPr>
+              <a:defRPr sz="1400"/>
+            </a:pPr>
+            <a:r>
+              <a:t>卖点：待核验</a:t>
+            </a:r>
+          </a:p>
+          <a:p>
+            <a:pPr>
+              <a:defRPr sz="1400"/>
+            </a:pPr>
+            <a:r>
+              <a:t>链接：https://example.invalid/demo/xianyu/1</a:t>
+            </a:r>
+          </a:p>
+        </p:txBody>
+      </p:sp>
+    </p:spTree>
+  </p:cSld>
+  <p:clrMapOvr>
+    <a:masterClrMapping/>
+  </p:clrMapOvr>
+</p:sld>
+</file>
+
+<file path=ppt/slides/slide20.xml><?xml version="1.0" encoding="utf-8"?>
+<p:sld xmlns:a="http://schemas.openxmlformats.org/drawingml/2006/main" xmlns:p="http://schemas.openxmlformats.org/presentationml/2006/main" xmlns:r="http://schemas.openxmlformats.org/officeDocument/2006/relationships">
+  <p:cSld>
+    <p:spTree>
+      <p:nvGrpSpPr>
+        <p:cNvPr id="1" name=""/>
+        <p:cNvGrpSpPr/>
+        <p:nvPr/>
+      </p:nvGrpSpPr>
+      <p:grpSpPr/>
+      <p:sp>
+        <p:nvSpPr>
+          <p:cNvPr id="2" name="TextBox 1"/>
+          <p:cNvSpPr txBox="1"/>
+          <p:nvPr/>
+        </p:nvSpPr>
+        <p:spPr>
+          <a:xfrm>
+            <a:off x="548640" y="365760"/>
+            <a:ext cx="11064240" cy="6126480"/>
+          </a:xfrm>
+          <a:prstGeom prst="rect">
+            <a:avLst/>
+          </a:prstGeom>
+          <a:noFill/>
+        </p:spPr>
+        <p:txBody>
+          <a:bodyPr wrap="square">
+            <a:spAutoFit/>
+          </a:bodyPr>
+          <a:lstStyle/>
+          <a:p/>
+          <a:p>
+            <a:pPr>
+              <a:defRPr sz="1800" b="1"/>
+            </a:pPr>
+            <a:r>
+              <a:t>#10  [演示] 闲鱼 超自然摸金陪 同行 1号</a:t>
+            </a:r>
+          </a:p>
+          <a:p>
+            <a:pPr>
+              <a:defRPr sz="1400"/>
+            </a:pPr>
+            <a:r>
+              <a:t>价格：21.0    销量/想要：20人想要</a:t>
+            </a:r>
+          </a:p>
+          <a:p>
+            <a:pPr>
+              <a:defRPr sz="1400"/>
+            </a:pPr>
+            <a:r>
+              <a:t>店铺/卖家：卖家1（演示）    发货地：广东深圳</a:t>
+            </a:r>
+          </a:p>
+          <a:p>
+            <a:pPr>
+              <a:defRPr sz="1400"/>
+            </a:pPr>
+            <a:r>
+              <a:t>SKU：详情页为演示地址或无详情链接</a:t>
+            </a:r>
+          </a:p>
+          <a:p>
+            <a:pPr>
+              <a:defRPr sz="1400"/>
+            </a:pPr>
+            <a:r>
+              <a:t>卖点：待核验</a:t>
+            </a:r>
+          </a:p>
+          <a:p>
+            <a:pPr>
+              <a:defRPr sz="1400"/>
+            </a:pPr>
+            <a:r>
+              <a:t>链接：https://example.invalid/demo/xianyu/10</a:t>
+            </a:r>
+          </a:p>
+        </p:txBody>
+      </p:sp>
+    </p:spTree>
+  </p:cSld>
+  <p:clrMapOvr>
+    <a:masterClrMapping/>
+  </p:clrMapOvr>
+</p:sld>
+</file>
+
+<file path=ppt/slides/slide21.xml><?xml version="1.0" encoding="utf-8"?>
+<p:sld xmlns:a="http://schemas.openxmlformats.org/drawingml/2006/main" xmlns:p="http://schemas.openxmlformats.org/presentationml/2006/main" xmlns:r="http://schemas.openxmlformats.org/officeDocument/2006/relationships">
+  <p:cSld>
+    <p:spTree>
+      <p:nvGrpSpPr>
+        <p:cNvPr id="1" name=""/>
+        <p:cNvGrpSpPr/>
+        <p:nvPr/>
+      </p:nvGrpSpPr>
+      <p:grpSpPr/>
+      <p:pic>
+        <p:nvPicPr>
+          <p:cNvPr id="2" name="Picture 1" descr="详情卡片4.png"/>
+          <p:cNvPicPr>
+            <a:picLocks noChangeAspect="1"/>
+          </p:cNvPicPr>
+          <p:nvPr/>
+        </p:nvPicPr>
+        <p:blipFill>
+          <a:blip r:embed="rId2"/>
+          <a:stretch>
+            <a:fillRect/>
+          </a:stretch>
+        </p:blipFill>
+        <p:spPr>
+          <a:xfrm>
+            <a:off x="499719" y="274320"/>
+            <a:ext cx="11192256" cy="6217920"/>
+          </a:xfrm>
+          <a:prstGeom prst="rect">
+            <a:avLst/>
+          </a:prstGeom>
+        </p:spPr>
+      </p:pic>
+      <p:sp>
+        <p:nvSpPr>
+          <p:cNvPr id="3" name="TextBox 2"/>
+          <p:cNvSpPr txBox="1"/>
+          <p:nvPr/>
+        </p:nvSpPr>
+        <p:spPr>
+          <a:xfrm>
+            <a:off x="365760" y="6309360"/>
+            <a:ext cx="11430000" cy="548640"/>
+          </a:xfrm>
+          <a:prstGeom prst="rect">
+            <a:avLst/>
+          </a:prstGeom>
+          <a:noFill/>
+        </p:spPr>
+        <p:txBody>
+          <a:bodyPr wrap="none">
+            <a:spAutoFit/>
+          </a:bodyPr>
+          <a:lstStyle/>
+          <a:p/>
+          <a:p>
+            <a:pPr>
+              <a:defRPr sz="1200"/>
+            </a:pPr>
+            <a:r>
+              <a:t>商品详情（完整描述） - [演示] 闲鱼 超自然摸金陪 同行 1号</a:t>
+            </a:r>
+          </a:p>
+        </p:txBody>
+      </p:sp>
+    </p:spTree>
+  </p:cSld>
+  <p:clrMapOvr>
+    <a:masterClrMapping/>
+  </p:clrMapOvr>
+</p:sld>
+</file>
+
+<file path=ppt/slides/slide3.xml><?xml version="1.0" encoding="utf-8"?>
+<p:sld xmlns:a="http://schemas.openxmlformats.org/drawingml/2006/main" xmlns:p="http://schemas.openxmlformats.org/presentationml/2006/main" xmlns:r="http://schemas.openxmlformats.org/officeDocument/2006/relationships">
+  <p:cSld>
+    <p:spTree>
+      <p:nvGrpSpPr>
+        <p:cNvPr id="1" name=""/>
+        <p:cNvGrpSpPr/>
+        <p:nvPr/>
+      </p:nvGrpSpPr>
+      <p:grpSpPr/>
+      <p:pic>
+        <p:nvPicPr>
+          <p:cNvPr id="2" name="Picture 1" descr="详情卡片1.png"/>
+          <p:cNvPicPr>
+            <a:picLocks noChangeAspect="1"/>
+          </p:cNvPicPr>
+          <p:nvPr/>
+        </p:nvPicPr>
+        <p:blipFill>
+          <a:blip r:embed="rId2"/>
+          <a:stretch>
+            <a:fillRect/>
+          </a:stretch>
+        </p:blipFill>
+        <p:spPr>
+          <a:xfrm>
+            <a:off x="499719" y="274320"/>
+            <a:ext cx="11192256" cy="6217920"/>
+          </a:xfrm>
+          <a:prstGeom prst="rect">
+            <a:avLst/>
+          </a:prstGeom>
+        </p:spPr>
+      </p:pic>
+      <p:sp>
+        <p:nvSpPr>
+          <p:cNvPr id="3" name="TextBox 2"/>
+          <p:cNvSpPr txBox="1"/>
+          <p:nvPr/>
+        </p:nvSpPr>
+        <p:spPr>
+          <a:xfrm>
+            <a:off x="365760" y="6309360"/>
+            <a:ext cx="11430000" cy="548640"/>
+          </a:xfrm>
+          <a:prstGeom prst="rect">
+            <a:avLst/>
+          </a:prstGeom>
+          <a:noFill/>
+        </p:spPr>
+        <p:txBody>
+          <a:bodyPr wrap="none">
+            <a:spAutoFit/>
+          </a:bodyPr>
+          <a:lstStyle/>
+          <a:p/>
+          <a:p>
+            <a:pPr>
+              <a:defRPr sz="1200"/>
+            </a:pPr>
+            <a:r>
+              <a:t>商品详情（完整描述） - [演示] 闲鱼 超自然行动组摸金陪 同行 1号</a:t>
+            </a:r>
+          </a:p>
+        </p:txBody>
+      </p:sp>
+    </p:spTree>
+  </p:cSld>
+  <p:clrMapOvr>
+    <a:masterClrMapping/>
+  </p:clrMapOvr>
+</p:sld>
+</file>
+
+<file path=ppt/slides/slide4.xml><?xml version="1.0" encoding="utf-8"?>
+<p:sld xmlns:a="http://schemas.openxmlformats.org/drawingml/2006/main" xmlns:p="http://schemas.openxmlformats.org/presentationml/2006/main" xmlns:r="http://schemas.openxmlformats.org/officeDocument/2006/relationships">
+  <p:cSld>
+    <p:spTree>
+      <p:nvGrpSpPr>
+        <p:cNvPr id="1" name=""/>
+        <p:cNvGrpSpPr/>
+        <p:nvPr/>
+      </p:nvGrpSpPr>
+      <p:grpSpPr/>
+      <p:sp>
+        <p:nvSpPr>
+          <p:cNvPr id="2" name="TextBox 1"/>
+          <p:cNvSpPr txBox="1"/>
+          <p:nvPr/>
+        </p:nvSpPr>
+        <p:spPr>
+          <a:xfrm>
+            <a:off x="548640" y="365760"/>
+            <a:ext cx="11064240" cy="6126480"/>
+          </a:xfrm>
+          <a:prstGeom prst="rect">
+            <a:avLst/>
+          </a:prstGeom>
+          <a:noFill/>
+        </p:spPr>
+        <p:txBody>
+          <a:bodyPr wrap="square">
+            <a:spAutoFit/>
+          </a:bodyPr>
+          <a:lstStyle/>
+          <a:p/>
+          <a:p>
+            <a:pPr>
+              <a:defRPr sz="1800" b="1"/>
+            </a:pPr>
+            <a:r>
+              <a:t>#2  [演示] 闲鱼 超自然行动组摸金陪 同行 2号</a:t>
+            </a:r>
+          </a:p>
+          <a:p>
+            <a:pPr>
+              <a:defRPr sz="1400"/>
+            </a:pPr>
+            <a:r>
+              <a:t>价格：27.0    销量/想要：40人想要</a:t>
+            </a:r>
+          </a:p>
+          <a:p>
+            <a:pPr>
+              <a:defRPr sz="1400"/>
+            </a:pPr>
+            <a:r>
+              <a:t>店铺/卖家：卖家2（演示）    发货地：广东深圳</a:t>
+            </a:r>
+          </a:p>
+          <a:p>
+            <a:pPr>
+              <a:defRPr sz="1400"/>
+            </a:pPr>
+            <a:r>
+              <a:t>SKU：详情页为演示地址或无详情链接</a:t>
+            </a:r>
+          </a:p>
+          <a:p>
+            <a:pPr>
+              <a:defRPr sz="1400"/>
+            </a:pPr>
+            <a:r>
+              <a:t>卖点：待核验</a:t>
+            </a:r>
+          </a:p>
+          <a:p>
+            <a:pPr>
+              <a:defRPr sz="1400"/>
+            </a:pPr>
+            <a:r>
+              <a:t>链接：https://example.invalid/demo/xianyu/2</a:t>
+            </a:r>
+          </a:p>
+        </p:txBody>
+      </p:sp>
+    </p:spTree>
+  </p:cSld>
+  <p:clrMapOvr>
+    <a:masterClrMapping/>
+  </p:clrMapOvr>
+</p:sld>
+</file>
+
+<file path=ppt/slides/slide5.xml><?xml version="1.0" encoding="utf-8"?>
+<p:sld xmlns:a="http://schemas.openxmlformats.org/drawingml/2006/main" xmlns:p="http://schemas.openxmlformats.org/presentationml/2006/main" xmlns:r="http://schemas.openxmlformats.org/officeDocument/2006/relationships">
+  <p:cSld>
+    <p:spTree>
+      <p:nvGrpSpPr>
+        <p:cNvPr id="1" name=""/>
+        <p:cNvGrpSpPr/>
+        <p:nvPr/>
+      </p:nvGrpSpPr>
+      <p:grpSpPr/>
+      <p:pic>
+        <p:nvPicPr>
+          <p:cNvPr id="2" name="Picture 1" descr="详情卡片2.png"/>
+          <p:cNvPicPr>
+            <a:picLocks noChangeAspect="1"/>
+          </p:cNvPicPr>
+          <p:nvPr/>
+        </p:nvPicPr>
+        <p:blipFill>
+          <a:blip r:embed="rId2"/>
+          <a:stretch>
+            <a:fillRect/>
+          </a:stretch>
+        </p:blipFill>
+        <p:spPr>
+          <a:xfrm>
+            <a:off x="499719" y="274320"/>
+            <a:ext cx="11192256" cy="6217920"/>
+          </a:xfrm>
+          <a:prstGeom prst="rect">
+            <a:avLst/>
+          </a:prstGeom>
+        </p:spPr>
+      </p:pic>
+      <p:sp>
+        <p:nvSpPr>
+          <p:cNvPr id="3" name="TextBox 2"/>
+          <p:cNvSpPr txBox="1"/>
+          <p:nvPr/>
+        </p:nvSpPr>
+        <p:spPr>
+          <a:xfrm>
+            <a:off x="365760" y="6309360"/>
+            <a:ext cx="11430000" cy="548640"/>
+          </a:xfrm>
+          <a:prstGeom prst="rect">
+            <a:avLst/>
+          </a:prstGeom>
+          <a:noFill/>
+        </p:spPr>
+        <p:txBody>
+          <a:bodyPr wrap="none">
+            <a:spAutoFit/>
+          </a:bodyPr>
+          <a:lstStyle/>
+          <a:p/>
+          <a:p>
+            <a:pPr>
+              <a:defRPr sz="1200"/>
+            </a:pPr>
+            <a:r>
+              <a:t>商品详情（完整描述） - [演示] 闲鱼 超自然行动组摸金陪 同行 2号</a:t>
+            </a:r>
+          </a:p>
+        </p:txBody>
+      </p:sp>
+    </p:spTree>
+  </p:cSld>
+  <p:clrMapOvr>
+    <a:masterClrMapping/>
+  </p:clrMapOvr>
+</p:sld>
+</file>
+
+<file path=ppt/slides/slide6.xml><?xml version="1.0" encoding="utf-8"?>
+<p:sld xmlns:a="http://schemas.openxmlformats.org/drawingml/2006/main" xmlns:p="http://schemas.openxmlformats.org/presentationml/2006/main" xmlns:r="http://schemas.openxmlformats.org/officeDocument/2006/relationships">
+  <p:cSld>
+    <p:spTree>
+      <p:nvGrpSpPr>
+        <p:cNvPr id="1" name=""/>
+        <p:cNvGrpSpPr/>
+        <p:nvPr/>
+      </p:nvGrpSpPr>
+      <p:grpSpPr/>
+      <p:sp>
+        <p:nvSpPr>
+          <p:cNvPr id="2" name="TextBox 1"/>
+          <p:cNvSpPr txBox="1"/>
+          <p:nvPr/>
+        </p:nvSpPr>
+        <p:spPr>
+          <a:xfrm>
+            <a:off x="548640" y="365760"/>
+            <a:ext cx="11064240" cy="6126480"/>
+          </a:xfrm>
+          <a:prstGeom prst="rect">
+            <a:avLst/>
+          </a:prstGeom>
+          <a:noFill/>
+        </p:spPr>
+        <p:txBody>
+          <a:bodyPr wrap="square">
+            <a:spAutoFit/>
+          </a:bodyPr>
+          <a:lstStyle/>
+          <a:p/>
+          <a:p>
+            <a:pPr>
+              <a:defRPr sz="1800" b="1"/>
+            </a:pPr>
+            <a:r>
+              <a:t>#3  [演示] 闲鱼 超自然行动组摸金陪 同行 3号</a:t>
+            </a:r>
+          </a:p>
+          <a:p>
+            <a:pPr>
+              <a:defRPr sz="1400"/>
+            </a:pPr>
+            <a:r>
+              <a:t>价格：33.0    销量/想要：60人想要</a:t>
+            </a:r>
+          </a:p>
+          <a:p>
+            <a:pPr>
+              <a:defRPr sz="1400"/>
+            </a:pPr>
+            <a:r>
+              <a:t>店铺/卖家：卖家3（演示）    发货地：广东深圳</a:t>
+            </a:r>
+          </a:p>
+          <a:p>
+            <a:pPr>
+              <a:defRPr sz="1400"/>
+            </a:pPr>
+            <a:r>
+              <a:t>SKU：详情页为演示地址或无详情链接</a:t>
+            </a:r>
+          </a:p>
+          <a:p>
+            <a:pPr>
+              <a:defRPr sz="1400"/>
+            </a:pPr>
+            <a:r>
+              <a:t>卖点：待核验</a:t>
+            </a:r>
+          </a:p>
+          <a:p>
+            <a:pPr>
+              <a:defRPr sz="1400"/>
+            </a:pPr>
+            <a:r>
+              <a:t>链接：https://example.invalid/demo/xianyu/3</a:t>
+            </a:r>
+          </a:p>
+        </p:txBody>
+      </p:sp>
+    </p:spTree>
+  </p:cSld>
+  <p:clrMapOvr>
+    <a:masterClrMapping/>
+  </p:clrMapOvr>
+</p:sld>
+</file>
+
+<file path=ppt/slides/slide7.xml><?xml version="1.0" encoding="utf-8"?>
+<p:sld xmlns:a="http://schemas.openxmlformats.org/drawingml/2006/main" xmlns:p="http://schemas.openxmlformats.org/presentationml/2006/main" xmlns:r="http://schemas.openxmlformats.org/officeDocument/2006/relationships">
+  <p:cSld>
+    <p:spTree>
+      <p:nvGrpSpPr>
+        <p:cNvPr id="1" name=""/>
+        <p:cNvGrpSpPr/>
+        <p:nvPr/>
+      </p:nvGrpSpPr>
+      <p:grpSpPr/>
+      <p:pic>
+        <p:nvPicPr>
+          <p:cNvPr id="2" name="Picture 1" descr="详情卡片3.png"/>
+          <p:cNvPicPr>
+            <a:picLocks noChangeAspect="1"/>
+          </p:cNvPicPr>
+          <p:nvPr/>
+        </p:nvPicPr>
+        <p:blipFill>
+          <a:blip r:embed="rId2"/>
+          <a:stretch>
+            <a:fillRect/>
+          </a:stretch>
+        </p:blipFill>
+        <p:spPr>
+          <a:xfrm>
+            <a:off x="499719" y="274320"/>
+            <a:ext cx="11192256" cy="6217920"/>
+          </a:xfrm>
+          <a:prstGeom prst="rect">
+            <a:avLst/>
+          </a:prstGeom>
+        </p:spPr>
+      </p:pic>
+      <p:sp>
+        <p:nvSpPr>
+          <p:cNvPr id="3" name="TextBox 2"/>
+          <p:cNvSpPr txBox="1"/>
+          <p:nvPr/>
+        </p:nvSpPr>
+        <p:spPr>
+          <a:xfrm>
+            <a:off x="365760" y="6309360"/>
+            <a:ext cx="11430000" cy="548640"/>
+          </a:xfrm>
+          <a:prstGeom prst="rect">
+            <a:avLst/>
+          </a:prstGeom>
+          <a:noFill/>
+        </p:spPr>
+        <p:txBody>
+          <a:bodyPr wrap="none">
+            <a:spAutoFit/>
+          </a:bodyPr>
+          <a:lstStyle/>
+          <a:p/>
+          <a:p>
+            <a:pPr>
+              <a:defRPr sz="1200"/>
+            </a:pPr>
+            <a:r>
+              <a:t>商品详情（完整描述） - [演示] 闲鱼 超自然行动组摸金陪 同行 3号</a:t>
+            </a:r>
+          </a:p>
+        </p:txBody>
+      </p:sp>
+    </p:spTree>
+  </p:cSld>
+  <p:clrMapOvr>
+    <a:masterClrMapping/>
+  </p:clrMapOvr>
+</p:sld>
+</file>
+
+<file path=ppt/slides/slide8.xml><?xml version="1.0" encoding="utf-8"?>
+<p:sld xmlns:a="http://schemas.openxmlformats.org/drawingml/2006/main" xmlns:p="http://schemas.openxmlformats.org/presentationml/2006/main" xmlns:r="http://schemas.openxmlformats.org/officeDocument/2006/relationships">
+  <p:cSld>
+    <p:spTree>
+      <p:nvGrpSpPr>
+        <p:cNvPr id="1" name=""/>
+        <p:cNvGrpSpPr/>
+        <p:nvPr/>
+      </p:nvGrpSpPr>
+      <p:grpSpPr/>
+      <p:sp>
+        <p:nvSpPr>
+          <p:cNvPr id="2" name="TextBox 1"/>
+          <p:cNvSpPr txBox="1"/>
+          <p:nvPr/>
+        </p:nvSpPr>
+        <p:spPr>
+          <a:xfrm>
+            <a:off x="548640" y="365760"/>
+            <a:ext cx="11064240" cy="6126480"/>
+          </a:xfrm>
+          <a:prstGeom prst="rect">
+            <a:avLst/>
+          </a:prstGeom>
+          <a:noFill/>
+        </p:spPr>
+        <p:txBody>
+          <a:bodyPr wrap="square">
+            <a:spAutoFit/>
+          </a:bodyPr>
+          <a:lstStyle/>
+          <a:p/>
+          <a:p>
+            <a:pPr>
+              <a:defRPr sz="1800" b="1"/>
+            </a:pPr>
+            <a:r>
+              <a:t>#4  [演示] 闲鱼 超自然行动组 同行 1号</a:t>
+            </a:r>
+          </a:p>
+          <a:p>
+            <a:pPr>
+              <a:defRPr sz="1400"/>
+            </a:pPr>
+            <a:r>
+              <a:t>价格：21.0    销量/想要：20人想要</a:t>
+            </a:r>
+          </a:p>
+          <a:p>
+            <a:pPr>
+              <a:defRPr sz="1400"/>
+            </a:pPr>
+            <a:r>
+              <a:t>店铺/卖家：卖家1（演示）    发货地：广东深圳</a:t>
+            </a:r>
+          </a:p>
+          <a:p>
+            <a:pPr>
+              <a:defRPr sz="1400"/>
+            </a:pPr>
+            <a:r>
+              <a:t>SKU：详情页为演示地址或无详情链接</a:t>
+            </a:r>
+          </a:p>
+          <a:p>
+            <a:pPr>
+              <a:defRPr sz="1400"/>
+            </a:pPr>
+            <a:r>
+              <a:t>卖点：待核验</a:t>
+            </a:r>
+          </a:p>
+          <a:p>
+            <a:pPr>
+              <a:defRPr sz="1400"/>
+            </a:pPr>
+            <a:r>
+              <a:t>链接：https://example.invalid/demo/xianyu/4</a:t>
+            </a:r>
+          </a:p>
+        </p:txBody>
+      </p:sp>
+    </p:spTree>
+  </p:cSld>
+  <p:clrMapOvr>
+    <a:masterClrMapping/>
+  </p:clrMapOvr>
+</p:sld>
+</file>
+
+<file path=ppt/slides/slide9.xml><?xml version="1.0" encoding="utf-8"?>
+<p:sld xmlns:a="http://schemas.openxmlformats.org/drawingml/2006/main" xmlns:p="http://schemas.openxmlformats.org/presentationml/2006/main" xmlns:r="http://schemas.openxmlformats.org/officeDocument/2006/relationships">
+  <p:cSld>
+    <p:spTree>
+      <p:nvGrpSpPr>
+        <p:cNvPr id="1" name=""/>
+        <p:cNvGrpSpPr/>
+        <p:nvPr/>
+      </p:nvGrpSpPr>
+      <p:grpSpPr/>
+      <p:pic>
+        <p:nvPicPr>
+          <p:cNvPr id="2" name="Picture 1" descr="详情卡片4.png"/>
+          <p:cNvPicPr>
+            <a:picLocks noChangeAspect="1"/>
+          </p:cNvPicPr>
+          <p:nvPr/>
+        </p:nvPicPr>
+        <p:blipFill>
+          <a:blip r:embed="rId2"/>
+          <a:stretch>
+            <a:fillRect/>
+          </a:stretch>
+        </p:blipFill>
+        <p:spPr>
+          <a:xfrm>
+            <a:off x="499719" y="274320"/>
+            <a:ext cx="11192256" cy="6217920"/>
+          </a:xfrm>
+          <a:prstGeom prst="rect">
+            <a:avLst/>
+          </a:prstGeom>
+        </p:spPr>
+      </p:pic>
+      <p:sp>
+        <p:nvSpPr>
+          <p:cNvPr id="3" name="TextBox 2"/>
+          <p:cNvSpPr txBox="1"/>
+          <p:nvPr/>
+        </p:nvSpPr>
+        <p:spPr>
+          <a:xfrm>
+            <a:off x="365760" y="6309360"/>
+            <a:ext cx="11430000" cy="548640"/>
+          </a:xfrm>
+          <a:prstGeom prst="rect">
+            <a:avLst/>
+          </a:prstGeom>
+          <a:noFill/>
+        </p:spPr>
+        <p:txBody>
+          <a:bodyPr wrap="none">
+            <a:spAutoFit/>
+          </a:bodyPr>
+          <a:lstStyle/>
+          <a:p/>
+          <a:p>
+            <a:pPr>
+              <a:defRPr sz="1200"/>
+            </a:pPr>
+            <a:r>
+              <a:t>商品详情（完整描述） - [演示] 闲鱼 超自然行动组 同行 1号</a:t>
             </a:r>
           </a:p>
         </p:txBody>

--- a/archive/2026-09-30/xianyu/PPT报告/闲鱼同行爆款分析-2026-09-30.pptx
+++ b/archive/2026-09-30/xianyu/PPT报告/闲鱼同行爆款分析-2026-09-30.pptx
@@ -16,16 +16,6 @@
     <p:sldId id="264" r:id="rId15"/>
     <p:sldId id="265" r:id="rId16"/>
     <p:sldId id="266" r:id="rId17"/>
-    <p:sldId id="267" r:id="rId18"/>
-    <p:sldId id="268" r:id="rId19"/>
-    <p:sldId id="269" r:id="rId20"/>
-    <p:sldId id="270" r:id="rId21"/>
-    <p:sldId id="271" r:id="rId22"/>
-    <p:sldId id="272" r:id="rId23"/>
-    <p:sldId id="273" r:id="rId24"/>
-    <p:sldId id="274" r:id="rId25"/>
-    <p:sldId id="275" r:id="rId26"/>
-    <p:sldId id="276" r:id="rId27"/>
   </p:sldIdLst>
   <p:sldSz cx="12191695" cy="6858000" type="screen4x3"/>
   <p:notesSz cx="6858000" cy="9144000"/>
@@ -3229,23 +3219,23 @@
               <a:defRPr sz="1800" b="1"/>
             </a:pPr>
             <a:r>
-              <a:t>#5  [演示] 闲鱼 超自然行动组 同行 2号</a:t>
-            </a:r>
-          </a:p>
-          <a:p>
-            <a:pPr>
-              <a:defRPr sz="1400"/>
-            </a:pPr>
-            <a:r>
-              <a:t>价格：27.0    销量/想要：40人想要</a:t>
-            </a:r>
-          </a:p>
-          <a:p>
-            <a:pPr>
-              <a:defRPr sz="1400"/>
-            </a:pPr>
-            <a:r>
-              <a:t>店铺/卖家：卖家2（演示）    发货地：广东深圳</a:t>
+              <a:t>#9  [演示] 闲鱼 摸金陪玩 同行 3号</a:t>
+            </a:r>
+          </a:p>
+          <a:p>
+            <a:pPr>
+              <a:defRPr sz="1400"/>
+            </a:pPr>
+            <a:r>
+              <a:t>价格：33.0    销量/想要：60人想要</a:t>
+            </a:r>
+          </a:p>
+          <a:p>
+            <a:pPr>
+              <a:defRPr sz="1400"/>
+            </a:pPr>
+            <a:r>
+              <a:t>店铺/卖家：卖家3（演示）    发货地：广东深圳</a:t>
             </a:r>
           </a:p>
           <a:p>
@@ -3269,7 +3259,7 @@
               <a:defRPr sz="1400"/>
             </a:pPr>
             <a:r>
-              <a:t>链接：https://example.invalid/demo/xianyu/5</a:t>
+              <a:t>链接：https://example.invalid/demo/xianyu/9</a:t>
             </a:r>
           </a:p>
         </p:txBody>
@@ -3292,80 +3282,6 @@
         <p:nvPr/>
       </p:nvGrpSpPr>
       <p:grpSpPr/>
-      <p:pic>
-        <p:nvPicPr>
-          <p:cNvPr id="2" name="Picture 1" descr="详情卡片5.png"/>
-          <p:cNvPicPr>
-            <a:picLocks noChangeAspect="1"/>
-          </p:cNvPicPr>
-          <p:nvPr/>
-        </p:nvPicPr>
-        <p:blipFill>
-          <a:blip r:embed="rId2"/>
-          <a:stretch>
-            <a:fillRect/>
-          </a:stretch>
-        </p:blipFill>
-        <p:spPr>
-          <a:xfrm>
-            <a:off x="499719" y="274320"/>
-            <a:ext cx="11192256" cy="6217920"/>
-          </a:xfrm>
-          <a:prstGeom prst="rect">
-            <a:avLst/>
-          </a:prstGeom>
-        </p:spPr>
-      </p:pic>
-      <p:sp>
-        <p:nvSpPr>
-          <p:cNvPr id="3" name="TextBox 2"/>
-          <p:cNvSpPr txBox="1"/>
-          <p:nvPr/>
-        </p:nvSpPr>
-        <p:spPr>
-          <a:xfrm>
-            <a:off x="365760" y="6309360"/>
-            <a:ext cx="11430000" cy="548640"/>
-          </a:xfrm>
-          <a:prstGeom prst="rect">
-            <a:avLst/>
-          </a:prstGeom>
-          <a:noFill/>
-        </p:spPr>
-        <p:txBody>
-          <a:bodyPr wrap="none">
-            <a:spAutoFit/>
-          </a:bodyPr>
-          <a:lstStyle/>
-          <a:p/>
-          <a:p>
-            <a:pPr>
-              <a:defRPr sz="1200"/>
-            </a:pPr>
-            <a:r>
-              <a:t>商品详情（完整描述） - [演示] 闲鱼 超自然行动组 同行 2号</a:t>
-            </a:r>
-          </a:p>
-        </p:txBody>
-      </p:sp>
-    </p:spTree>
-  </p:cSld>
-  <p:clrMapOvr>
-    <a:masterClrMapping/>
-  </p:clrMapOvr>
-</p:sld>
-</file>
-
-<file path=ppt/slides/slide12.xml><?xml version="1.0" encoding="utf-8"?>
-<p:sld xmlns:a="http://schemas.openxmlformats.org/drawingml/2006/main" xmlns:p="http://schemas.openxmlformats.org/presentationml/2006/main" xmlns:r="http://schemas.openxmlformats.org/officeDocument/2006/relationships">
-  <p:cSld>
-    <p:spTree>
-      <p:nvGrpSpPr>
-        <p:cNvPr id="1" name=""/>
-        <p:cNvGrpSpPr/>
-        <p:nvPr/>
-      </p:nvGrpSpPr>
-      <p:grpSpPr/>
       <p:sp>
         <p:nvSpPr>
           <p:cNvPr id="2" name="TextBox 1"/>
@@ -3393,23 +3309,23 @@
               <a:defRPr sz="1800" b="1"/>
             </a:pPr>
             <a:r>
-              <a:t>#6  [演示] 闲鱼 超自然行动组 同行 3号</a:t>
-            </a:r>
-          </a:p>
-          <a:p>
-            <a:pPr>
-              <a:defRPr sz="1400"/>
-            </a:pPr>
-            <a:r>
-              <a:t>价格：33.0    销量/想要：60人想要</a:t>
-            </a:r>
-          </a:p>
-          <a:p>
-            <a:pPr>
-              <a:defRPr sz="1400"/>
-            </a:pPr>
-            <a:r>
-              <a:t>店铺/卖家：卖家3（演示）    发货地：广东深圳</a:t>
+              <a:t>#10  [演示] 闲鱼 超自然摸金陪 同行 1号</a:t>
+            </a:r>
+          </a:p>
+          <a:p>
+            <a:pPr>
+              <a:defRPr sz="1400"/>
+            </a:pPr>
+            <a:r>
+              <a:t>价格：21.0    销量/想要：20人想要</a:t>
+            </a:r>
+          </a:p>
+          <a:p>
+            <a:pPr>
+              <a:defRPr sz="1400"/>
+            </a:pPr>
+            <a:r>
+              <a:t>店铺/卖家：卖家1（演示）    发货地：广东深圳</a:t>
             </a:r>
           </a:p>
           <a:p>
@@ -3433,573 +3349,7 @@
               <a:defRPr sz="1400"/>
             </a:pPr>
             <a:r>
-              <a:t>链接：https://example.invalid/demo/xianyu/6</a:t>
-            </a:r>
-          </a:p>
-        </p:txBody>
-      </p:sp>
-    </p:spTree>
-  </p:cSld>
-  <p:clrMapOvr>
-    <a:masterClrMapping/>
-  </p:clrMapOvr>
-</p:sld>
-</file>
-
-<file path=ppt/slides/slide13.xml><?xml version="1.0" encoding="utf-8"?>
-<p:sld xmlns:a="http://schemas.openxmlformats.org/drawingml/2006/main" xmlns:p="http://schemas.openxmlformats.org/presentationml/2006/main" xmlns:r="http://schemas.openxmlformats.org/officeDocument/2006/relationships">
-  <p:cSld>
-    <p:spTree>
-      <p:nvGrpSpPr>
-        <p:cNvPr id="1" name=""/>
-        <p:cNvGrpSpPr/>
-        <p:nvPr/>
-      </p:nvGrpSpPr>
-      <p:grpSpPr/>
-      <p:pic>
-        <p:nvPicPr>
-          <p:cNvPr id="2" name="Picture 1" descr="详情卡片6.png"/>
-          <p:cNvPicPr>
-            <a:picLocks noChangeAspect="1"/>
-          </p:cNvPicPr>
-          <p:nvPr/>
-        </p:nvPicPr>
-        <p:blipFill>
-          <a:blip r:embed="rId2"/>
-          <a:stretch>
-            <a:fillRect/>
-          </a:stretch>
-        </p:blipFill>
-        <p:spPr>
-          <a:xfrm>
-            <a:off x="499719" y="274320"/>
-            <a:ext cx="11192256" cy="6217920"/>
-          </a:xfrm>
-          <a:prstGeom prst="rect">
-            <a:avLst/>
-          </a:prstGeom>
-        </p:spPr>
-      </p:pic>
-      <p:sp>
-        <p:nvSpPr>
-          <p:cNvPr id="3" name="TextBox 2"/>
-          <p:cNvSpPr txBox="1"/>
-          <p:nvPr/>
-        </p:nvSpPr>
-        <p:spPr>
-          <a:xfrm>
-            <a:off x="365760" y="6309360"/>
-            <a:ext cx="11430000" cy="548640"/>
-          </a:xfrm>
-          <a:prstGeom prst="rect">
-            <a:avLst/>
-          </a:prstGeom>
-          <a:noFill/>
-        </p:spPr>
-        <p:txBody>
-          <a:bodyPr wrap="none">
-            <a:spAutoFit/>
-          </a:bodyPr>
-          <a:lstStyle/>
-          <a:p/>
-          <a:p>
-            <a:pPr>
-              <a:defRPr sz="1200"/>
-            </a:pPr>
-            <a:r>
-              <a:t>商品详情（完整描述） - [演示] 闲鱼 超自然行动组 同行 3号</a:t>
-            </a:r>
-          </a:p>
-        </p:txBody>
-      </p:sp>
-    </p:spTree>
-  </p:cSld>
-  <p:clrMapOvr>
-    <a:masterClrMapping/>
-  </p:clrMapOvr>
-</p:sld>
-</file>
-
-<file path=ppt/slides/slide14.xml><?xml version="1.0" encoding="utf-8"?>
-<p:sld xmlns:a="http://schemas.openxmlformats.org/drawingml/2006/main" xmlns:p="http://schemas.openxmlformats.org/presentationml/2006/main" xmlns:r="http://schemas.openxmlformats.org/officeDocument/2006/relationships">
-  <p:cSld>
-    <p:spTree>
-      <p:nvGrpSpPr>
-        <p:cNvPr id="1" name=""/>
-        <p:cNvGrpSpPr/>
-        <p:nvPr/>
-      </p:nvGrpSpPr>
-      <p:grpSpPr/>
-      <p:sp>
-        <p:nvSpPr>
-          <p:cNvPr id="2" name="TextBox 1"/>
-          <p:cNvSpPr txBox="1"/>
-          <p:nvPr/>
-        </p:nvSpPr>
-        <p:spPr>
-          <a:xfrm>
-            <a:off x="548640" y="365760"/>
-            <a:ext cx="11064240" cy="6126480"/>
-          </a:xfrm>
-          <a:prstGeom prst="rect">
-            <a:avLst/>
-          </a:prstGeom>
-          <a:noFill/>
-        </p:spPr>
-        <p:txBody>
-          <a:bodyPr wrap="square">
-            <a:spAutoFit/>
-          </a:bodyPr>
-          <a:lstStyle/>
-          <a:p/>
-          <a:p>
-            <a:pPr>
-              <a:defRPr sz="1800" b="1"/>
-            </a:pPr>
-            <a:r>
-              <a:t>#7  [演示] 闲鱼 摸金陪玩 同行 1号</a:t>
-            </a:r>
-          </a:p>
-          <a:p>
-            <a:pPr>
-              <a:defRPr sz="1400"/>
-            </a:pPr>
-            <a:r>
-              <a:t>价格：21.0    销量/想要：20人想要</a:t>
-            </a:r>
-          </a:p>
-          <a:p>
-            <a:pPr>
-              <a:defRPr sz="1400"/>
-            </a:pPr>
-            <a:r>
-              <a:t>店铺/卖家：卖家1（演示）    发货地：广东深圳</a:t>
-            </a:r>
-          </a:p>
-          <a:p>
-            <a:pPr>
-              <a:defRPr sz="1400"/>
-            </a:pPr>
-            <a:r>
-              <a:t>SKU：详情页为演示地址或无详情链接</a:t>
-            </a:r>
-          </a:p>
-          <a:p>
-            <a:pPr>
-              <a:defRPr sz="1400"/>
-            </a:pPr>
-            <a:r>
-              <a:t>卖点：待核验</a:t>
-            </a:r>
-          </a:p>
-          <a:p>
-            <a:pPr>
-              <a:defRPr sz="1400"/>
-            </a:pPr>
-            <a:r>
-              <a:t>链接：https://example.invalid/demo/xianyu/7</a:t>
-            </a:r>
-          </a:p>
-        </p:txBody>
-      </p:sp>
-    </p:spTree>
-  </p:cSld>
-  <p:clrMapOvr>
-    <a:masterClrMapping/>
-  </p:clrMapOvr>
-</p:sld>
-</file>
-
-<file path=ppt/slides/slide15.xml><?xml version="1.0" encoding="utf-8"?>
-<p:sld xmlns:a="http://schemas.openxmlformats.org/drawingml/2006/main" xmlns:p="http://schemas.openxmlformats.org/presentationml/2006/main" xmlns:r="http://schemas.openxmlformats.org/officeDocument/2006/relationships">
-  <p:cSld>
-    <p:spTree>
-      <p:nvGrpSpPr>
-        <p:cNvPr id="1" name=""/>
-        <p:cNvGrpSpPr/>
-        <p:nvPr/>
-      </p:nvGrpSpPr>
-      <p:grpSpPr/>
-      <p:pic>
-        <p:nvPicPr>
-          <p:cNvPr id="2" name="Picture 1" descr="详情卡片7.png"/>
-          <p:cNvPicPr>
-            <a:picLocks noChangeAspect="1"/>
-          </p:cNvPicPr>
-          <p:nvPr/>
-        </p:nvPicPr>
-        <p:blipFill>
-          <a:blip r:embed="rId2"/>
-          <a:stretch>
-            <a:fillRect/>
-          </a:stretch>
-        </p:blipFill>
-        <p:spPr>
-          <a:xfrm>
-            <a:off x="499719" y="274320"/>
-            <a:ext cx="11192256" cy="6217920"/>
-          </a:xfrm>
-          <a:prstGeom prst="rect">
-            <a:avLst/>
-          </a:prstGeom>
-        </p:spPr>
-      </p:pic>
-      <p:sp>
-        <p:nvSpPr>
-          <p:cNvPr id="3" name="TextBox 2"/>
-          <p:cNvSpPr txBox="1"/>
-          <p:nvPr/>
-        </p:nvSpPr>
-        <p:spPr>
-          <a:xfrm>
-            <a:off x="365760" y="6309360"/>
-            <a:ext cx="11430000" cy="548640"/>
-          </a:xfrm>
-          <a:prstGeom prst="rect">
-            <a:avLst/>
-          </a:prstGeom>
-          <a:noFill/>
-        </p:spPr>
-        <p:txBody>
-          <a:bodyPr wrap="none">
-            <a:spAutoFit/>
-          </a:bodyPr>
-          <a:lstStyle/>
-          <a:p/>
-          <a:p>
-            <a:pPr>
-              <a:defRPr sz="1200"/>
-            </a:pPr>
-            <a:r>
-              <a:t>商品详情（完整描述） - [演示] 闲鱼 摸金陪玩 同行 1号</a:t>
-            </a:r>
-          </a:p>
-        </p:txBody>
-      </p:sp>
-    </p:spTree>
-  </p:cSld>
-  <p:clrMapOvr>
-    <a:masterClrMapping/>
-  </p:clrMapOvr>
-</p:sld>
-</file>
-
-<file path=ppt/slides/slide16.xml><?xml version="1.0" encoding="utf-8"?>
-<p:sld xmlns:a="http://schemas.openxmlformats.org/drawingml/2006/main" xmlns:p="http://schemas.openxmlformats.org/presentationml/2006/main" xmlns:r="http://schemas.openxmlformats.org/officeDocument/2006/relationships">
-  <p:cSld>
-    <p:spTree>
-      <p:nvGrpSpPr>
-        <p:cNvPr id="1" name=""/>
-        <p:cNvGrpSpPr/>
-        <p:nvPr/>
-      </p:nvGrpSpPr>
-      <p:grpSpPr/>
-      <p:sp>
-        <p:nvSpPr>
-          <p:cNvPr id="2" name="TextBox 1"/>
-          <p:cNvSpPr txBox="1"/>
-          <p:nvPr/>
-        </p:nvSpPr>
-        <p:spPr>
-          <a:xfrm>
-            <a:off x="548640" y="365760"/>
-            <a:ext cx="11064240" cy="6126480"/>
-          </a:xfrm>
-          <a:prstGeom prst="rect">
-            <a:avLst/>
-          </a:prstGeom>
-          <a:noFill/>
-        </p:spPr>
-        <p:txBody>
-          <a:bodyPr wrap="square">
-            <a:spAutoFit/>
-          </a:bodyPr>
-          <a:lstStyle/>
-          <a:p/>
-          <a:p>
-            <a:pPr>
-              <a:defRPr sz="1800" b="1"/>
-            </a:pPr>
-            <a:r>
-              <a:t>#8  [演示] 闲鱼 摸金陪玩 同行 2号</a:t>
-            </a:r>
-          </a:p>
-          <a:p>
-            <a:pPr>
-              <a:defRPr sz="1400"/>
-            </a:pPr>
-            <a:r>
-              <a:t>价格：27.0    销量/想要：40人想要</a:t>
-            </a:r>
-          </a:p>
-          <a:p>
-            <a:pPr>
-              <a:defRPr sz="1400"/>
-            </a:pPr>
-            <a:r>
-              <a:t>店铺/卖家：卖家2（演示）    发货地：广东深圳</a:t>
-            </a:r>
-          </a:p>
-          <a:p>
-            <a:pPr>
-              <a:defRPr sz="1400"/>
-            </a:pPr>
-            <a:r>
-              <a:t>SKU：详情页为演示地址或无详情链接</a:t>
-            </a:r>
-          </a:p>
-          <a:p>
-            <a:pPr>
-              <a:defRPr sz="1400"/>
-            </a:pPr>
-            <a:r>
-              <a:t>卖点：待核验</a:t>
-            </a:r>
-          </a:p>
-          <a:p>
-            <a:pPr>
-              <a:defRPr sz="1400"/>
-            </a:pPr>
-            <a:r>
-              <a:t>链接：https://example.invalid/demo/xianyu/8</a:t>
-            </a:r>
-          </a:p>
-        </p:txBody>
-      </p:sp>
-    </p:spTree>
-  </p:cSld>
-  <p:clrMapOvr>
-    <a:masterClrMapping/>
-  </p:clrMapOvr>
-</p:sld>
-</file>
-
-<file path=ppt/slides/slide17.xml><?xml version="1.0" encoding="utf-8"?>
-<p:sld xmlns:a="http://schemas.openxmlformats.org/drawingml/2006/main" xmlns:p="http://schemas.openxmlformats.org/presentationml/2006/main" xmlns:r="http://schemas.openxmlformats.org/officeDocument/2006/relationships">
-  <p:cSld>
-    <p:spTree>
-      <p:nvGrpSpPr>
-        <p:cNvPr id="1" name=""/>
-        <p:cNvGrpSpPr/>
-        <p:nvPr/>
-      </p:nvGrpSpPr>
-      <p:grpSpPr/>
-      <p:pic>
-        <p:nvPicPr>
-          <p:cNvPr id="2" name="Picture 1" descr="详情卡片8.png"/>
-          <p:cNvPicPr>
-            <a:picLocks noChangeAspect="1"/>
-          </p:cNvPicPr>
-          <p:nvPr/>
-        </p:nvPicPr>
-        <p:blipFill>
-          <a:blip r:embed="rId2"/>
-          <a:stretch>
-            <a:fillRect/>
-          </a:stretch>
-        </p:blipFill>
-        <p:spPr>
-          <a:xfrm>
-            <a:off x="499719" y="274320"/>
-            <a:ext cx="11192256" cy="6217920"/>
-          </a:xfrm>
-          <a:prstGeom prst="rect">
-            <a:avLst/>
-          </a:prstGeom>
-        </p:spPr>
-      </p:pic>
-      <p:sp>
-        <p:nvSpPr>
-          <p:cNvPr id="3" name="TextBox 2"/>
-          <p:cNvSpPr txBox="1"/>
-          <p:nvPr/>
-        </p:nvSpPr>
-        <p:spPr>
-          <a:xfrm>
-            <a:off x="365760" y="6309360"/>
-            <a:ext cx="11430000" cy="548640"/>
-          </a:xfrm>
-          <a:prstGeom prst="rect">
-            <a:avLst/>
-          </a:prstGeom>
-          <a:noFill/>
-        </p:spPr>
-        <p:txBody>
-          <a:bodyPr wrap="none">
-            <a:spAutoFit/>
-          </a:bodyPr>
-          <a:lstStyle/>
-          <a:p/>
-          <a:p>
-            <a:pPr>
-              <a:defRPr sz="1200"/>
-            </a:pPr>
-            <a:r>
-              <a:t>商品详情（完整描述） - [演示] 闲鱼 摸金陪玩 同行 2号</a:t>
-            </a:r>
-          </a:p>
-        </p:txBody>
-      </p:sp>
-    </p:spTree>
-  </p:cSld>
-  <p:clrMapOvr>
-    <a:masterClrMapping/>
-  </p:clrMapOvr>
-</p:sld>
-</file>
-
-<file path=ppt/slides/slide18.xml><?xml version="1.0" encoding="utf-8"?>
-<p:sld xmlns:a="http://schemas.openxmlformats.org/drawingml/2006/main" xmlns:p="http://schemas.openxmlformats.org/presentationml/2006/main" xmlns:r="http://schemas.openxmlformats.org/officeDocument/2006/relationships">
-  <p:cSld>
-    <p:spTree>
-      <p:nvGrpSpPr>
-        <p:cNvPr id="1" name=""/>
-        <p:cNvGrpSpPr/>
-        <p:nvPr/>
-      </p:nvGrpSpPr>
-      <p:grpSpPr/>
-      <p:sp>
-        <p:nvSpPr>
-          <p:cNvPr id="2" name="TextBox 1"/>
-          <p:cNvSpPr txBox="1"/>
-          <p:nvPr/>
-        </p:nvSpPr>
-        <p:spPr>
-          <a:xfrm>
-            <a:off x="548640" y="365760"/>
-            <a:ext cx="11064240" cy="6126480"/>
-          </a:xfrm>
-          <a:prstGeom prst="rect">
-            <a:avLst/>
-          </a:prstGeom>
-          <a:noFill/>
-        </p:spPr>
-        <p:txBody>
-          <a:bodyPr wrap="square">
-            <a:spAutoFit/>
-          </a:bodyPr>
-          <a:lstStyle/>
-          <a:p/>
-          <a:p>
-            <a:pPr>
-              <a:defRPr sz="1800" b="1"/>
-            </a:pPr>
-            <a:r>
-              <a:t>#9  [演示] 闲鱼 摸金陪玩 同行 3号</a:t>
-            </a:r>
-          </a:p>
-          <a:p>
-            <a:pPr>
-              <a:defRPr sz="1400"/>
-            </a:pPr>
-            <a:r>
-              <a:t>价格：33.0    销量/想要：60人想要</a:t>
-            </a:r>
-          </a:p>
-          <a:p>
-            <a:pPr>
-              <a:defRPr sz="1400"/>
-            </a:pPr>
-            <a:r>
-              <a:t>店铺/卖家：卖家3（演示）    发货地：广东深圳</a:t>
-            </a:r>
-          </a:p>
-          <a:p>
-            <a:pPr>
-              <a:defRPr sz="1400"/>
-            </a:pPr>
-            <a:r>
-              <a:t>SKU：详情页为演示地址或无详情链接</a:t>
-            </a:r>
-          </a:p>
-          <a:p>
-            <a:pPr>
-              <a:defRPr sz="1400"/>
-            </a:pPr>
-            <a:r>
-              <a:t>卖点：待核验</a:t>
-            </a:r>
-          </a:p>
-          <a:p>
-            <a:pPr>
-              <a:defRPr sz="1400"/>
-            </a:pPr>
-            <a:r>
-              <a:t>链接：https://example.invalid/demo/xianyu/9</a:t>
-            </a:r>
-          </a:p>
-        </p:txBody>
-      </p:sp>
-    </p:spTree>
-  </p:cSld>
-  <p:clrMapOvr>
-    <a:masterClrMapping/>
-  </p:clrMapOvr>
-</p:sld>
-</file>
-
-<file path=ppt/slides/slide19.xml><?xml version="1.0" encoding="utf-8"?>
-<p:sld xmlns:a="http://schemas.openxmlformats.org/drawingml/2006/main" xmlns:p="http://schemas.openxmlformats.org/presentationml/2006/main" xmlns:r="http://schemas.openxmlformats.org/officeDocument/2006/relationships">
-  <p:cSld>
-    <p:spTree>
-      <p:nvGrpSpPr>
-        <p:cNvPr id="1" name=""/>
-        <p:cNvGrpSpPr/>
-        <p:nvPr/>
-      </p:nvGrpSpPr>
-      <p:grpSpPr/>
-      <p:pic>
-        <p:nvPicPr>
-          <p:cNvPr id="2" name="Picture 1" descr="详情卡片9.png"/>
-          <p:cNvPicPr>
-            <a:picLocks noChangeAspect="1"/>
-          </p:cNvPicPr>
-          <p:nvPr/>
-        </p:nvPicPr>
-        <p:blipFill>
-          <a:blip r:embed="rId2"/>
-          <a:stretch>
-            <a:fillRect/>
-          </a:stretch>
-        </p:blipFill>
-        <p:spPr>
-          <a:xfrm>
-            <a:off x="499719" y="274320"/>
-            <a:ext cx="11192256" cy="6217920"/>
-          </a:xfrm>
-          <a:prstGeom prst="rect">
-            <a:avLst/>
-          </a:prstGeom>
-        </p:spPr>
-      </p:pic>
-      <p:sp>
-        <p:nvSpPr>
-          <p:cNvPr id="3" name="TextBox 2"/>
-          <p:cNvSpPr txBox="1"/>
-          <p:nvPr/>
-        </p:nvSpPr>
-        <p:spPr>
-          <a:xfrm>
-            <a:off x="365760" y="6309360"/>
-            <a:ext cx="11430000" cy="548640"/>
-          </a:xfrm>
-          <a:prstGeom prst="rect">
-            <a:avLst/>
-          </a:prstGeom>
-          <a:noFill/>
-        </p:spPr>
-        <p:txBody>
-          <a:bodyPr wrap="none">
-            <a:spAutoFit/>
-          </a:bodyPr>
-          <a:lstStyle/>
-          <a:p/>
-          <a:p>
-            <a:pPr>
-              <a:defRPr sz="1200"/>
-            </a:pPr>
-            <a:r>
-              <a:t>商品详情（完整描述） - [演示] 闲鱼 摸金陪玩 同行 3号</a:t>
+              <a:t>链接：https://example.invalid/demo/xianyu/10</a:t>
             </a:r>
           </a:p>
         </p:txBody>
@@ -4102,7 +3452,7 @@
 </p:sld>
 </file>
 
-<file path=ppt/slides/slide20.xml><?xml version="1.0" encoding="utf-8"?>
+<file path=ppt/slides/slide3.xml><?xml version="1.0" encoding="utf-8"?>
 <p:sld xmlns:a="http://schemas.openxmlformats.org/drawingml/2006/main" xmlns:p="http://schemas.openxmlformats.org/presentationml/2006/main" xmlns:r="http://schemas.openxmlformats.org/officeDocument/2006/relationships">
   <p:cSld>
     <p:spTree>
@@ -4139,23 +3489,23 @@
               <a:defRPr sz="1800" b="1"/>
             </a:pPr>
             <a:r>
-              <a:t>#10  [演示] 闲鱼 超自然摸金陪 同行 1号</a:t>
-            </a:r>
-          </a:p>
-          <a:p>
-            <a:pPr>
-              <a:defRPr sz="1400"/>
-            </a:pPr>
-            <a:r>
-              <a:t>价格：21.0    销量/想要：20人想要</a:t>
-            </a:r>
-          </a:p>
-          <a:p>
-            <a:pPr>
-              <a:defRPr sz="1400"/>
-            </a:pPr>
-            <a:r>
-              <a:t>店铺/卖家：卖家1（演示）    发货地：广东深圳</a:t>
+              <a:t>#2  [演示] 闲鱼 超自然行动组摸金陪 同行 2号</a:t>
+            </a:r>
+          </a:p>
+          <a:p>
+            <a:pPr>
+              <a:defRPr sz="1400"/>
+            </a:pPr>
+            <a:r>
+              <a:t>价格：27.0    销量/想要：40人想要</a:t>
+            </a:r>
+          </a:p>
+          <a:p>
+            <a:pPr>
+              <a:defRPr sz="1400"/>
+            </a:pPr>
+            <a:r>
+              <a:t>店铺/卖家：卖家2（演示）    发货地：广东深圳</a:t>
             </a:r>
           </a:p>
           <a:p>
@@ -4179,155 +3529,7 @@
               <a:defRPr sz="1400"/>
             </a:pPr>
             <a:r>
-              <a:t>链接：https://example.invalid/demo/xianyu/10</a:t>
-            </a:r>
-          </a:p>
-        </p:txBody>
-      </p:sp>
-    </p:spTree>
-  </p:cSld>
-  <p:clrMapOvr>
-    <a:masterClrMapping/>
-  </p:clrMapOvr>
-</p:sld>
-</file>
-
-<file path=ppt/slides/slide21.xml><?xml version="1.0" encoding="utf-8"?>
-<p:sld xmlns:a="http://schemas.openxmlformats.org/drawingml/2006/main" xmlns:p="http://schemas.openxmlformats.org/presentationml/2006/main" xmlns:r="http://schemas.openxmlformats.org/officeDocument/2006/relationships">
-  <p:cSld>
-    <p:spTree>
-      <p:nvGrpSpPr>
-        <p:cNvPr id="1" name=""/>
-        <p:cNvGrpSpPr/>
-        <p:nvPr/>
-      </p:nvGrpSpPr>
-      <p:grpSpPr/>
-      <p:pic>
-        <p:nvPicPr>
-          <p:cNvPr id="2" name="Picture 1" descr="详情卡片4.png"/>
-          <p:cNvPicPr>
-            <a:picLocks noChangeAspect="1"/>
-          </p:cNvPicPr>
-          <p:nvPr/>
-        </p:nvPicPr>
-        <p:blipFill>
-          <a:blip r:embed="rId2"/>
-          <a:stretch>
-            <a:fillRect/>
-          </a:stretch>
-        </p:blipFill>
-        <p:spPr>
-          <a:xfrm>
-            <a:off x="499719" y="274320"/>
-            <a:ext cx="11192256" cy="6217920"/>
-          </a:xfrm>
-          <a:prstGeom prst="rect">
-            <a:avLst/>
-          </a:prstGeom>
-        </p:spPr>
-      </p:pic>
-      <p:sp>
-        <p:nvSpPr>
-          <p:cNvPr id="3" name="TextBox 2"/>
-          <p:cNvSpPr txBox="1"/>
-          <p:nvPr/>
-        </p:nvSpPr>
-        <p:spPr>
-          <a:xfrm>
-            <a:off x="365760" y="6309360"/>
-            <a:ext cx="11430000" cy="548640"/>
-          </a:xfrm>
-          <a:prstGeom prst="rect">
-            <a:avLst/>
-          </a:prstGeom>
-          <a:noFill/>
-        </p:spPr>
-        <p:txBody>
-          <a:bodyPr wrap="none">
-            <a:spAutoFit/>
-          </a:bodyPr>
-          <a:lstStyle/>
-          <a:p/>
-          <a:p>
-            <a:pPr>
-              <a:defRPr sz="1200"/>
-            </a:pPr>
-            <a:r>
-              <a:t>商品详情（完整描述） - [演示] 闲鱼 超自然摸金陪 同行 1号</a:t>
-            </a:r>
-          </a:p>
-        </p:txBody>
-      </p:sp>
-    </p:spTree>
-  </p:cSld>
-  <p:clrMapOvr>
-    <a:masterClrMapping/>
-  </p:clrMapOvr>
-</p:sld>
-</file>
-
-<file path=ppt/slides/slide3.xml><?xml version="1.0" encoding="utf-8"?>
-<p:sld xmlns:a="http://schemas.openxmlformats.org/drawingml/2006/main" xmlns:p="http://schemas.openxmlformats.org/presentationml/2006/main" xmlns:r="http://schemas.openxmlformats.org/officeDocument/2006/relationships">
-  <p:cSld>
-    <p:spTree>
-      <p:nvGrpSpPr>
-        <p:cNvPr id="1" name=""/>
-        <p:cNvGrpSpPr/>
-        <p:nvPr/>
-      </p:nvGrpSpPr>
-      <p:grpSpPr/>
-      <p:pic>
-        <p:nvPicPr>
-          <p:cNvPr id="2" name="Picture 1" descr="详情卡片1.png"/>
-          <p:cNvPicPr>
-            <a:picLocks noChangeAspect="1"/>
-          </p:cNvPicPr>
-          <p:nvPr/>
-        </p:nvPicPr>
-        <p:blipFill>
-          <a:blip r:embed="rId2"/>
-          <a:stretch>
-            <a:fillRect/>
-          </a:stretch>
-        </p:blipFill>
-        <p:spPr>
-          <a:xfrm>
-            <a:off x="499719" y="274320"/>
-            <a:ext cx="11192256" cy="6217920"/>
-          </a:xfrm>
-          <a:prstGeom prst="rect">
-            <a:avLst/>
-          </a:prstGeom>
-        </p:spPr>
-      </p:pic>
-      <p:sp>
-        <p:nvSpPr>
-          <p:cNvPr id="3" name="TextBox 2"/>
-          <p:cNvSpPr txBox="1"/>
-          <p:nvPr/>
-        </p:nvSpPr>
-        <p:spPr>
-          <a:xfrm>
-            <a:off x="365760" y="6309360"/>
-            <a:ext cx="11430000" cy="548640"/>
-          </a:xfrm>
-          <a:prstGeom prst="rect">
-            <a:avLst/>
-          </a:prstGeom>
-          <a:noFill/>
-        </p:spPr>
-        <p:txBody>
-          <a:bodyPr wrap="none">
-            <a:spAutoFit/>
-          </a:bodyPr>
-          <a:lstStyle/>
-          <a:p/>
-          <a:p>
-            <a:pPr>
-              <a:defRPr sz="1200"/>
-            </a:pPr>
-            <a:r>
-              <a:t>商品详情（完整描述） - [演示] 闲鱼 超自然行动组摸金陪 同行 1号</a:t>
+              <a:t>链接：https://example.invalid/demo/xianyu/2</a:t>
             </a:r>
           </a:p>
         </p:txBody>
@@ -4377,23 +3579,23 @@
               <a:defRPr sz="1800" b="1"/>
             </a:pPr>
             <a:r>
-              <a:t>#2  [演示] 闲鱼 超自然行动组摸金陪 同行 2号</a:t>
-            </a:r>
-          </a:p>
-          <a:p>
-            <a:pPr>
-              <a:defRPr sz="1400"/>
-            </a:pPr>
-            <a:r>
-              <a:t>价格：27.0    销量/想要：40人想要</a:t>
-            </a:r>
-          </a:p>
-          <a:p>
-            <a:pPr>
-              <a:defRPr sz="1400"/>
-            </a:pPr>
-            <a:r>
-              <a:t>店铺/卖家：卖家2（演示）    发货地：广东深圳</a:t>
+              <a:t>#3  [演示] 闲鱼 超自然行动组摸金陪 同行 3号</a:t>
+            </a:r>
+          </a:p>
+          <a:p>
+            <a:pPr>
+              <a:defRPr sz="1400"/>
+            </a:pPr>
+            <a:r>
+              <a:t>价格：33.0    销量/想要：60人想要</a:t>
+            </a:r>
+          </a:p>
+          <a:p>
+            <a:pPr>
+              <a:defRPr sz="1400"/>
+            </a:pPr>
+            <a:r>
+              <a:t>店铺/卖家：卖家3（演示）    发货地：广东深圳</a:t>
             </a:r>
           </a:p>
           <a:p>
@@ -4417,7 +3619,7 @@
               <a:defRPr sz="1400"/>
             </a:pPr>
             <a:r>
-              <a:t>链接：https://example.invalid/demo/xianyu/2</a:t>
+              <a:t>链接：https://example.invalid/demo/xianyu/3</a:t>
             </a:r>
           </a:p>
         </p:txBody>
@@ -4440,40 +3642,16 @@
         <p:nvPr/>
       </p:nvGrpSpPr>
       <p:grpSpPr/>
-      <p:pic>
-        <p:nvPicPr>
-          <p:cNvPr id="2" name="Picture 1" descr="详情卡片2.png"/>
-          <p:cNvPicPr>
-            <a:picLocks noChangeAspect="1"/>
-          </p:cNvPicPr>
+      <p:sp>
+        <p:nvSpPr>
+          <p:cNvPr id="2" name="TextBox 1"/>
+          <p:cNvSpPr txBox="1"/>
           <p:nvPr/>
-        </p:nvPicPr>
-        <p:blipFill>
-          <a:blip r:embed="rId2"/>
-          <a:stretch>
-            <a:fillRect/>
-          </a:stretch>
-        </p:blipFill>
+        </p:nvSpPr>
         <p:spPr>
           <a:xfrm>
-            <a:off x="499719" y="274320"/>
-            <a:ext cx="11192256" cy="6217920"/>
-          </a:xfrm>
-          <a:prstGeom prst="rect">
-            <a:avLst/>
-          </a:prstGeom>
-        </p:spPr>
-      </p:pic>
-      <p:sp>
-        <p:nvSpPr>
-          <p:cNvPr id="3" name="TextBox 2"/>
-          <p:cNvSpPr txBox="1"/>
-          <p:nvPr/>
-        </p:nvSpPr>
-        <p:spPr>
-          <a:xfrm>
-            <a:off x="365760" y="6309360"/>
-            <a:ext cx="11430000" cy="548640"/>
+            <a:off x="548640" y="365760"/>
+            <a:ext cx="11064240" cy="6126480"/>
           </a:xfrm>
           <a:prstGeom prst="rect">
             <a:avLst/>
@@ -4481,17 +3659,57 @@
           <a:noFill/>
         </p:spPr>
         <p:txBody>
-          <a:bodyPr wrap="none">
+          <a:bodyPr wrap="square">
             <a:spAutoFit/>
           </a:bodyPr>
           <a:lstStyle/>
           <a:p/>
           <a:p>
             <a:pPr>
-              <a:defRPr sz="1200"/>
-            </a:pPr>
-            <a:r>
-              <a:t>商品详情（完整描述） - [演示] 闲鱼 超自然行动组摸金陪 同行 2号</a:t>
+              <a:defRPr sz="1800" b="1"/>
+            </a:pPr>
+            <a:r>
+              <a:t>#4  [演示] 闲鱼 超自然行动组 同行 1号</a:t>
+            </a:r>
+          </a:p>
+          <a:p>
+            <a:pPr>
+              <a:defRPr sz="1400"/>
+            </a:pPr>
+            <a:r>
+              <a:t>价格：21.0    销量/想要：20人想要</a:t>
+            </a:r>
+          </a:p>
+          <a:p>
+            <a:pPr>
+              <a:defRPr sz="1400"/>
+            </a:pPr>
+            <a:r>
+              <a:t>店铺/卖家：卖家1（演示）    发货地：广东深圳</a:t>
+            </a:r>
+          </a:p>
+          <a:p>
+            <a:pPr>
+              <a:defRPr sz="1400"/>
+            </a:pPr>
+            <a:r>
+              <a:t>SKU：详情页为演示地址或无详情链接</a:t>
+            </a:r>
+          </a:p>
+          <a:p>
+            <a:pPr>
+              <a:defRPr sz="1400"/>
+            </a:pPr>
+            <a:r>
+              <a:t>卖点：待核验</a:t>
+            </a:r>
+          </a:p>
+          <a:p>
+            <a:pPr>
+              <a:defRPr sz="1400"/>
+            </a:pPr>
+            <a:r>
+              <a:t>链接：https://example.invalid/demo/xianyu/4</a:t>
             </a:r>
           </a:p>
         </p:txBody>
@@ -4541,23 +3759,23 @@
               <a:defRPr sz="1800" b="1"/>
             </a:pPr>
             <a:r>
-              <a:t>#3  [演示] 闲鱼 超自然行动组摸金陪 同行 3号</a:t>
-            </a:r>
-          </a:p>
-          <a:p>
-            <a:pPr>
-              <a:defRPr sz="1400"/>
-            </a:pPr>
-            <a:r>
-              <a:t>价格：33.0    销量/想要：60人想要</a:t>
-            </a:r>
-          </a:p>
-          <a:p>
-            <a:pPr>
-              <a:defRPr sz="1400"/>
-            </a:pPr>
-            <a:r>
-              <a:t>店铺/卖家：卖家3（演示）    发货地：广东深圳</a:t>
+              <a:t>#5  [演示] 闲鱼 超自然行动组 同行 2号</a:t>
+            </a:r>
+          </a:p>
+          <a:p>
+            <a:pPr>
+              <a:defRPr sz="1400"/>
+            </a:pPr>
+            <a:r>
+              <a:t>价格：27.0    销量/想要：40人想要</a:t>
+            </a:r>
+          </a:p>
+          <a:p>
+            <a:pPr>
+              <a:defRPr sz="1400"/>
+            </a:pPr>
+            <a:r>
+              <a:t>店铺/卖家：卖家2（演示）    发货地：广东深圳</a:t>
             </a:r>
           </a:p>
           <a:p>
@@ -4581,7 +3799,7 @@
               <a:defRPr sz="1400"/>
             </a:pPr>
             <a:r>
-              <a:t>链接：https://example.invalid/demo/xianyu/3</a:t>
+              <a:t>链接：https://example.invalid/demo/xianyu/5</a:t>
             </a:r>
           </a:p>
         </p:txBody>
@@ -4604,40 +3822,16 @@
         <p:nvPr/>
       </p:nvGrpSpPr>
       <p:grpSpPr/>
-      <p:pic>
-        <p:nvPicPr>
-          <p:cNvPr id="2" name="Picture 1" descr="详情卡片3.png"/>
-          <p:cNvPicPr>
-            <a:picLocks noChangeAspect="1"/>
-          </p:cNvPicPr>
+      <p:sp>
+        <p:nvSpPr>
+          <p:cNvPr id="2" name="TextBox 1"/>
+          <p:cNvSpPr txBox="1"/>
           <p:nvPr/>
-        </p:nvPicPr>
-        <p:blipFill>
-          <a:blip r:embed="rId2"/>
-          <a:stretch>
-            <a:fillRect/>
-          </a:stretch>
-        </p:blipFill>
+        </p:nvSpPr>
         <p:spPr>
           <a:xfrm>
-            <a:off x="499719" y="274320"/>
-            <a:ext cx="11192256" cy="6217920"/>
-          </a:xfrm>
-          <a:prstGeom prst="rect">
-            <a:avLst/>
-          </a:prstGeom>
-        </p:spPr>
-      </p:pic>
-      <p:sp>
-        <p:nvSpPr>
-          <p:cNvPr id="3" name="TextBox 2"/>
-          <p:cNvSpPr txBox="1"/>
-          <p:nvPr/>
-        </p:nvSpPr>
-        <p:spPr>
-          <a:xfrm>
-            <a:off x="365760" y="6309360"/>
-            <a:ext cx="11430000" cy="548640"/>
+            <a:off x="548640" y="365760"/>
+            <a:ext cx="11064240" cy="6126480"/>
           </a:xfrm>
           <a:prstGeom prst="rect">
             <a:avLst/>
@@ -4645,17 +3839,57 @@
           <a:noFill/>
         </p:spPr>
         <p:txBody>
-          <a:bodyPr wrap="none">
+          <a:bodyPr wrap="square">
             <a:spAutoFit/>
           </a:bodyPr>
           <a:lstStyle/>
           <a:p/>
           <a:p>
             <a:pPr>
-              <a:defRPr sz="1200"/>
-            </a:pPr>
-            <a:r>
-              <a:t>商品详情（完整描述） - [演示] 闲鱼 超自然行动组摸金陪 同行 3号</a:t>
+              <a:defRPr sz="1800" b="1"/>
+            </a:pPr>
+            <a:r>
+              <a:t>#6  [演示] 闲鱼 超自然行动组 同行 3号</a:t>
+            </a:r>
+          </a:p>
+          <a:p>
+            <a:pPr>
+              <a:defRPr sz="1400"/>
+            </a:pPr>
+            <a:r>
+              <a:t>价格：33.0    销量/想要：60人想要</a:t>
+            </a:r>
+          </a:p>
+          <a:p>
+            <a:pPr>
+              <a:defRPr sz="1400"/>
+            </a:pPr>
+            <a:r>
+              <a:t>店铺/卖家：卖家3（演示）    发货地：广东深圳</a:t>
+            </a:r>
+          </a:p>
+          <a:p>
+            <a:pPr>
+              <a:defRPr sz="1400"/>
+            </a:pPr>
+            <a:r>
+              <a:t>SKU：详情页为演示地址或无详情链接</a:t>
+            </a:r>
+          </a:p>
+          <a:p>
+            <a:pPr>
+              <a:defRPr sz="1400"/>
+            </a:pPr>
+            <a:r>
+              <a:t>卖点：待核验</a:t>
+            </a:r>
+          </a:p>
+          <a:p>
+            <a:pPr>
+              <a:defRPr sz="1400"/>
+            </a:pPr>
+            <a:r>
+              <a:t>链接：https://example.invalid/demo/xianyu/6</a:t>
             </a:r>
           </a:p>
         </p:txBody>
@@ -4705,7 +3939,7 @@
               <a:defRPr sz="1800" b="1"/>
             </a:pPr>
             <a:r>
-              <a:t>#4  [演示] 闲鱼 超自然行动组 同行 1号</a:t>
+              <a:t>#7  [演示] 闲鱼 摸金陪玩 同行 1号</a:t>
             </a:r>
           </a:p>
           <a:p>
@@ -4745,7 +3979,7 @@
               <a:defRPr sz="1400"/>
             </a:pPr>
             <a:r>
-              <a:t>链接：https://example.invalid/demo/xianyu/4</a:t>
+              <a:t>链接：https://example.invalid/demo/xianyu/7</a:t>
             </a:r>
           </a:p>
         </p:txBody>
@@ -4768,40 +4002,16 @@
         <p:nvPr/>
       </p:nvGrpSpPr>
       <p:grpSpPr/>
-      <p:pic>
-        <p:nvPicPr>
-          <p:cNvPr id="2" name="Picture 1" descr="详情卡片4.png"/>
-          <p:cNvPicPr>
-            <a:picLocks noChangeAspect="1"/>
-          </p:cNvPicPr>
+      <p:sp>
+        <p:nvSpPr>
+          <p:cNvPr id="2" name="TextBox 1"/>
+          <p:cNvSpPr txBox="1"/>
           <p:nvPr/>
-        </p:nvPicPr>
-        <p:blipFill>
-          <a:blip r:embed="rId2"/>
-          <a:stretch>
-            <a:fillRect/>
-          </a:stretch>
-        </p:blipFill>
+        </p:nvSpPr>
         <p:spPr>
           <a:xfrm>
-            <a:off x="499719" y="274320"/>
-            <a:ext cx="11192256" cy="6217920"/>
-          </a:xfrm>
-          <a:prstGeom prst="rect">
-            <a:avLst/>
-          </a:prstGeom>
-        </p:spPr>
-      </p:pic>
-      <p:sp>
-        <p:nvSpPr>
-          <p:cNvPr id="3" name="TextBox 2"/>
-          <p:cNvSpPr txBox="1"/>
-          <p:nvPr/>
-        </p:nvSpPr>
-        <p:spPr>
-          <a:xfrm>
-            <a:off x="365760" y="6309360"/>
-            <a:ext cx="11430000" cy="548640"/>
+            <a:off x="548640" y="365760"/>
+            <a:ext cx="11064240" cy="6126480"/>
           </a:xfrm>
           <a:prstGeom prst="rect">
             <a:avLst/>
@@ -4809,17 +4019,57 @@
           <a:noFill/>
         </p:spPr>
         <p:txBody>
-          <a:bodyPr wrap="none">
+          <a:bodyPr wrap="square">
             <a:spAutoFit/>
           </a:bodyPr>
           <a:lstStyle/>
           <a:p/>
           <a:p>
             <a:pPr>
-              <a:defRPr sz="1200"/>
-            </a:pPr>
-            <a:r>
-              <a:t>商品详情（完整描述） - [演示] 闲鱼 超自然行动组 同行 1号</a:t>
+              <a:defRPr sz="1800" b="1"/>
+            </a:pPr>
+            <a:r>
+              <a:t>#8  [演示] 闲鱼 摸金陪玩 同行 2号</a:t>
+            </a:r>
+          </a:p>
+          <a:p>
+            <a:pPr>
+              <a:defRPr sz="1400"/>
+            </a:pPr>
+            <a:r>
+              <a:t>价格：27.0    销量/想要：40人想要</a:t>
+            </a:r>
+          </a:p>
+          <a:p>
+            <a:pPr>
+              <a:defRPr sz="1400"/>
+            </a:pPr>
+            <a:r>
+              <a:t>店铺/卖家：卖家2（演示）    发货地：广东深圳</a:t>
+            </a:r>
+          </a:p>
+          <a:p>
+            <a:pPr>
+              <a:defRPr sz="1400"/>
+            </a:pPr>
+            <a:r>
+              <a:t>SKU：详情页为演示地址或无详情链接</a:t>
+            </a:r>
+          </a:p>
+          <a:p>
+            <a:pPr>
+              <a:defRPr sz="1400"/>
+            </a:pPr>
+            <a:r>
+              <a:t>卖点：待核验</a:t>
+            </a:r>
+          </a:p>
+          <a:p>
+            <a:pPr>
+              <a:defRPr sz="1400"/>
+            </a:pPr>
+            <a:r>
+              <a:t>链接：https://example.invalid/demo/xianyu/8</a:t>
             </a:r>
           </a:p>
         </p:txBody>

--- a/archive/2026-09-30/xianyu/PPT报告/闲鱼同行爆款分析-2026-09-30.pptx
+++ b/archive/2026-09-30/xianyu/PPT报告/闲鱼同行爆款分析-2026-09-30.pptx
@@ -16,6 +16,11 @@
     <p:sldId id="264" r:id="rId15"/>
     <p:sldId id="265" r:id="rId16"/>
     <p:sldId id="266" r:id="rId17"/>
+    <p:sldId id="267" r:id="rId18"/>
+    <p:sldId id="268" r:id="rId19"/>
+    <p:sldId id="269" r:id="rId20"/>
+    <p:sldId id="270" r:id="rId21"/>
+    <p:sldId id="271" r:id="rId22"/>
   </p:sldIdLst>
   <p:sldSz cx="12191695" cy="6858000" type="screen4x3"/>
   <p:notesSz cx="6858000" cy="9144000"/>
@@ -3133,43 +3138,7 @@
               <a:defRPr sz="1800"/>
             </a:pPr>
             <a:r>
-              <a:t>2026-09-30  ·  10 个商品</a:t>
-            </a:r>
-          </a:p>
-        </p:txBody>
-      </p:sp>
-      <p:sp>
-        <p:nvSpPr>
-          <p:cNvPr id="3" name="TextBox 2"/>
-          <p:cNvSpPr txBox="1"/>
-          <p:nvPr/>
-        </p:nvSpPr>
-        <p:spPr>
-          <a:xfrm>
-            <a:off x="731520" y="4206240"/>
-            <a:ext cx="10698480" cy="548640"/>
-          </a:xfrm>
-          <a:prstGeom prst="rect">
-            <a:avLst/>
-          </a:prstGeom>
-          <a:noFill/>
-        </p:spPr>
-        <p:txBody>
-          <a:bodyPr wrap="none">
-            <a:spAutoFit/>
-          </a:bodyPr>
-          <a:lstStyle/>
-          <a:p/>
-          <a:p>
-            <a:pPr>
-              <a:defRPr sz="1400">
-                <a:solidFill>
-                  <a:srgbClr val="C06040"/>
-                </a:solidFill>
-              </a:defRPr>
-            </a:pPr>
-            <a:r>
-              <a:t>* 本页为【演示数据】，仅用于验证链路</a:t>
+              <a:t>2026-09-30  ·  15 个商品</a:t>
             </a:r>
           </a:p>
         </p:txBody>
@@ -3219,31 +3188,31 @@
               <a:defRPr sz="1800" b="1"/>
             </a:pPr>
             <a:r>
-              <a:t>#9  [演示] 闲鱼 摸金陪玩 同行 3号</a:t>
-            </a:r>
-          </a:p>
-          <a:p>
-            <a:pPr>
-              <a:defRPr sz="1400"/>
-            </a:pPr>
-            <a:r>
-              <a:t>价格：33.0    销量/想要：60人想要</a:t>
-            </a:r>
-          </a:p>
-          <a:p>
-            <a:pPr>
-              <a:defRPr sz="1400"/>
-            </a:pPr>
-            <a:r>
-              <a:t>店铺/卖家：卖家3（演示）    发货地：广东深圳</a:t>
-            </a:r>
-          </a:p>
-          <a:p>
-            <a:pPr>
-              <a:defRPr sz="1400"/>
-            </a:pPr>
-            <a:r>
-              <a:t>SKU：详情页为演示地址或无详情链接</a:t>
+              <a:t>#9  游戏【超自然行动组】 [火]最新兑换码 安卓 iOS苹果通用 下单后秒发卡 兑换后游戏内秒到账!  自由无规则可开出：0-10W金砖 铲铲币 999祈愿石 时装 桃木剑 荧光棒 镜生遗梦时装 白光莹时装 水王子时装 罗丽时装限定皮肤圣光之谕 遗失的童话 心跳摇 天使的呼唤 圣心之泪 鱼骨 小雨摇 姬...</a:t>
+            </a:r>
+          </a:p>
+          <a:p>
+            <a:pPr>
+              <a:defRPr sz="1400"/>
+            </a:pPr>
+            <a:r>
+              <a:t>价格：1    销量/想要：</a:t>
+            </a:r>
+          </a:p>
+          <a:p>
+            <a:pPr>
+              <a:defRPr sz="1400"/>
+            </a:pPr>
+            <a:r>
+              <a:t>店铺/卖家：最火网游小店    发货地：</a:t>
+            </a:r>
+          </a:p>
+          <a:p>
+            <a:pPr>
+              <a:defRPr sz="1400"/>
+            </a:pPr>
+            <a:r>
+              <a:t>SKU：详情页无SKU区块或需登录</a:t>
             </a:r>
           </a:p>
           <a:p>
@@ -3259,7 +3228,7 @@
               <a:defRPr sz="1400"/>
             </a:pPr>
             <a:r>
-              <a:t>链接：https://example.invalid/demo/xianyu/9</a:t>
+              <a:t>链接：https://www.goofish.com/item?id=1032052911294</a:t>
             </a:r>
           </a:p>
         </p:txBody>
@@ -3309,31 +3278,31 @@
               <a:defRPr sz="1800" b="1"/>
             </a:pPr>
             <a:r>
-              <a:t>#10  [演示] 闲鱼 超自然摸金陪 同行 1号</a:t>
-            </a:r>
-          </a:p>
-          <a:p>
-            <a:pPr>
-              <a:defRPr sz="1400"/>
-            </a:pPr>
-            <a:r>
-              <a:t>价格：21.0    销量/想要：20人想要</a:t>
-            </a:r>
-          </a:p>
-          <a:p>
-            <a:pPr>
-              <a:defRPr sz="1400"/>
-            </a:pPr>
-            <a:r>
-              <a:t>店铺/卖家：卖家1（演示）    发货地：广东深圳</a:t>
-            </a:r>
-          </a:p>
-          <a:p>
-            <a:pPr>
-              <a:defRPr sz="1400"/>
-            </a:pPr>
-            <a:r>
-              <a:t>SKU：详情页为演示地址或无详情链接</a:t>
+              <a:t>#10  【签到免费领】【瑶台梦皮肤兑换码】超自然行动组莉莉限定皮肤+ 同款小兔宠物 1.官方活动，童叟无欺，嫌麻烦别来 2..道具是永久的 3.下单前先咨询客服查询 4.参加完活动填写好自己的区服等待查询结果 5.签到三天可发放，支持领取到道具后再下单 6.通过游戏内邮箱等发送，无套路 7.每人限量领取1个道...</a:t>
+            </a:r>
+          </a:p>
+          <a:p>
+            <a:pPr>
+              <a:defRPr sz="1400"/>
+            </a:pPr>
+            <a:r>
+              <a:t>价格：2.87    销量/想要：</a:t>
+            </a:r>
+          </a:p>
+          <a:p>
+            <a:pPr>
+              <a:defRPr sz="1400"/>
+            </a:pPr>
+            <a:r>
+              <a:t>店铺/卖家：海洋星举重川贝    发货地：</a:t>
+            </a:r>
+          </a:p>
+          <a:p>
+            <a:pPr>
+              <a:defRPr sz="1400"/>
+            </a:pPr>
+            <a:r>
+              <a:t>SKU：详情页无SKU区块或需登录</a:t>
             </a:r>
           </a:p>
           <a:p>
@@ -3349,7 +3318,457 @@
               <a:defRPr sz="1400"/>
             </a:pPr>
             <a:r>
-              <a:t>链接：https://example.invalid/demo/xianyu/10</a:t>
+              <a:t>链接：https://www.goofish.com/item?id=1054796031749</a:t>
+            </a:r>
+          </a:p>
+        </p:txBody>
+      </p:sp>
+    </p:spTree>
+  </p:cSld>
+  <p:clrMapOvr>
+    <a:masterClrMapping/>
+  </p:clrMapOvr>
+</p:sld>
+</file>
+
+<file path=ppt/slides/slide12.xml><?xml version="1.0" encoding="utf-8"?>
+<p:sld xmlns:a="http://schemas.openxmlformats.org/drawingml/2006/main" xmlns:p="http://schemas.openxmlformats.org/presentationml/2006/main" xmlns:r="http://schemas.openxmlformats.org/officeDocument/2006/relationships">
+  <p:cSld>
+    <p:spTree>
+      <p:nvGrpSpPr>
+        <p:cNvPr id="1" name=""/>
+        <p:cNvGrpSpPr/>
+        <p:nvPr/>
+      </p:nvGrpSpPr>
+      <p:grpSpPr/>
+      <p:sp>
+        <p:nvSpPr>
+          <p:cNvPr id="2" name="TextBox 1"/>
+          <p:cNvSpPr txBox="1"/>
+          <p:nvPr/>
+        </p:nvSpPr>
+        <p:spPr>
+          <a:xfrm>
+            <a:off x="548640" y="365760"/>
+            <a:ext cx="11064240" cy="6126480"/>
+          </a:xfrm>
+          <a:prstGeom prst="rect">
+            <a:avLst/>
+          </a:prstGeom>
+          <a:noFill/>
+        </p:spPr>
+        <p:txBody>
+          <a:bodyPr wrap="square">
+            <a:spAutoFit/>
+          </a:bodyPr>
+          <a:lstStyle/>
+          <a:p/>
+          <a:p>
+            <a:pPr>
+              <a:defRPr sz="1800" b="1"/>
+            </a:pPr>
+            <a:r>
+              <a:t>#11  【99亿代金】《超自然行动组》成品号+皮肤载具全解锁！ 关键词⚠️：★（成品号）★（皮肤多）★（载具全）★（装扮丰富）  ✓账号皮肤多，载具全，装扮丰富，角色皮肤、员工、珍宝阁装扮齐全 ✓梦居等级高，铲铲币多，装备道具都在，直接登录就能玩 ✓账号稳定不封号，支持全平台互通，可换绑，组队开麦都...</a:t>
+            </a:r>
+          </a:p>
+          <a:p>
+            <a:pPr>
+              <a:defRPr sz="1400"/>
+            </a:pPr>
+            <a:r>
+              <a:t>价格：13    销量/想要：</a:t>
+            </a:r>
+          </a:p>
+          <a:p>
+            <a:pPr>
+              <a:defRPr sz="1400"/>
+            </a:pPr>
+            <a:r>
+              <a:t>店铺/卖家：腼腆的椰子蟹    发货地：</a:t>
+            </a:r>
+          </a:p>
+          <a:p>
+            <a:pPr>
+              <a:defRPr sz="1400"/>
+            </a:pPr>
+            <a:r>
+              <a:t>SKU：详情页无SKU区块或需登录</a:t>
+            </a:r>
+          </a:p>
+          <a:p>
+            <a:pPr>
+              <a:defRPr sz="1400"/>
+            </a:pPr>
+            <a:r>
+              <a:t>卖点：待核验</a:t>
+            </a:r>
+          </a:p>
+          <a:p>
+            <a:pPr>
+              <a:defRPr sz="1400"/>
+            </a:pPr>
+            <a:r>
+              <a:t>链接：https://www.goofish.com/item?id=1082905588012</a:t>
+            </a:r>
+          </a:p>
+        </p:txBody>
+      </p:sp>
+    </p:spTree>
+  </p:cSld>
+  <p:clrMapOvr>
+    <a:masterClrMapping/>
+  </p:clrMapOvr>
+</p:sld>
+</file>
+
+<file path=ppt/slides/slide13.xml><?xml version="1.0" encoding="utf-8"?>
+<p:sld xmlns:a="http://schemas.openxmlformats.org/drawingml/2006/main" xmlns:p="http://schemas.openxmlformats.org/presentationml/2006/main" xmlns:r="http://schemas.openxmlformats.org/officeDocument/2006/relationships">
+  <p:cSld>
+    <p:spTree>
+      <p:nvGrpSpPr>
+        <p:cNvPr id="1" name=""/>
+        <p:cNvGrpSpPr/>
+        <p:nvPr/>
+      </p:nvGrpSpPr>
+      <p:grpSpPr/>
+      <p:sp>
+        <p:nvSpPr>
+          <p:cNvPr id="2" name="TextBox 1"/>
+          <p:cNvSpPr txBox="1"/>
+          <p:nvPr/>
+        </p:nvSpPr>
+        <p:spPr>
+          <a:xfrm>
+            <a:off x="548640" y="365760"/>
+            <a:ext cx="11064240" cy="6126480"/>
+          </a:xfrm>
+          <a:prstGeom prst="rect">
+            <a:avLst/>
+          </a:prstGeom>
+          <a:noFill/>
+        </p:spPr>
+        <p:txBody>
+          <a:bodyPr wrap="square">
+            <a:spAutoFit/>
+          </a:bodyPr>
+          <a:lstStyle/>
+          <a:p/>
+          <a:p>
+            <a:pPr>
+              <a:defRPr sz="1800" b="1"/>
+            </a:pPr>
+            <a:r>
+              <a:t>#12  超自然行动组（正版内部特权号免费送） ……………………………………&amp;hellip...</a:t>
+            </a:r>
+          </a:p>
+          <a:p>
+            <a:pPr>
+              <a:defRPr sz="1400"/>
+            </a:pPr>
+            <a:r>
+              <a:t>价格：8.52    销量/想要：</a:t>
+            </a:r>
+          </a:p>
+          <a:p>
+            <a:pPr>
+              <a:defRPr sz="1400"/>
+            </a:pPr>
+            <a:r>
+              <a:t>店铺/卖家：cokelala    发货地：</a:t>
+            </a:r>
+          </a:p>
+          <a:p>
+            <a:pPr>
+              <a:defRPr sz="1400"/>
+            </a:pPr>
+            <a:r>
+              <a:t>SKU：详情页无SKU区块或需登录</a:t>
+            </a:r>
+          </a:p>
+          <a:p>
+            <a:pPr>
+              <a:defRPr sz="1400"/>
+            </a:pPr>
+            <a:r>
+              <a:t>卖点：待核验</a:t>
+            </a:r>
+          </a:p>
+          <a:p>
+            <a:pPr>
+              <a:defRPr sz="1400"/>
+            </a:pPr>
+            <a:r>
+              <a:t>链接：https://www.goofish.com/item?id=1077625559538</a:t>
+            </a:r>
+          </a:p>
+        </p:txBody>
+      </p:sp>
+    </p:spTree>
+  </p:cSld>
+  <p:clrMapOvr>
+    <a:masterClrMapping/>
+  </p:clrMapOvr>
+</p:sld>
+</file>
+
+<file path=ppt/slides/slide14.xml><?xml version="1.0" encoding="utf-8"?>
+<p:sld xmlns:a="http://schemas.openxmlformats.org/drawingml/2006/main" xmlns:p="http://schemas.openxmlformats.org/presentationml/2006/main" xmlns:r="http://schemas.openxmlformats.org/officeDocument/2006/relationships">
+  <p:cSld>
+    <p:spTree>
+      <p:nvGrpSpPr>
+        <p:cNvPr id="1" name=""/>
+        <p:cNvGrpSpPr/>
+        <p:nvPr/>
+      </p:nvGrpSpPr>
+      <p:grpSpPr/>
+      <p:sp>
+        <p:nvSpPr>
+          <p:cNvPr id="2" name="TextBox 1"/>
+          <p:cNvSpPr txBox="1"/>
+          <p:nvPr/>
+        </p:nvSpPr>
+        <p:spPr>
+          <a:xfrm>
+            <a:off x="548640" y="365760"/>
+            <a:ext cx="11064240" cy="6126480"/>
+          </a:xfrm>
+          <a:prstGeom prst="rect">
+            <a:avLst/>
+          </a:prstGeom>
+          <a:noFill/>
+        </p:spPr>
+        <p:txBody>
+          <a:bodyPr wrap="square">
+            <a:spAutoFit/>
+          </a:bodyPr>
+          <a:lstStyle/>
+          <a:p/>
+          <a:p>
+            <a:pPr>
+              <a:defRPr sz="1800" b="1"/>
+            </a:pPr>
+            <a:r>
+              <a:t>#13  超自然行动组莉莉背包陪3r/h全图 摸金装备默认：3额外背包➕扇子➕腰包（传送除颤摸金符） 会卡龙珠/音响  虫谷扇子换琵琶 无麦</a:t>
+            </a:r>
+          </a:p>
+          <a:p>
+            <a:pPr>
+              <a:defRPr sz="1400"/>
+            </a:pPr>
+            <a:r>
+              <a:t>价格：3    销量/想要：</a:t>
+            </a:r>
+          </a:p>
+          <a:p>
+            <a:pPr>
+              <a:defRPr sz="1400"/>
+            </a:pPr>
+            <a:r>
+              <a:t>店铺/卖家：JIA宏    发货地：</a:t>
+            </a:r>
+          </a:p>
+          <a:p>
+            <a:pPr>
+              <a:defRPr sz="1400"/>
+            </a:pPr>
+            <a:r>
+              <a:t>SKU：详情页无SKU区块或需登录</a:t>
+            </a:r>
+          </a:p>
+          <a:p>
+            <a:pPr>
+              <a:defRPr sz="1400"/>
+            </a:pPr>
+            <a:r>
+              <a:t>卖点：待核验</a:t>
+            </a:r>
+          </a:p>
+          <a:p>
+            <a:pPr>
+              <a:defRPr sz="1400"/>
+            </a:pPr>
+            <a:r>
+              <a:t>链接：https://www.goofish.com/item?id=1009343153318</a:t>
+            </a:r>
+          </a:p>
+        </p:txBody>
+      </p:sp>
+    </p:spTree>
+  </p:cSld>
+  <p:clrMapOvr>
+    <a:masterClrMapping/>
+  </p:clrMapOvr>
+</p:sld>
+</file>
+
+<file path=ppt/slides/slide15.xml><?xml version="1.0" encoding="utf-8"?>
+<p:sld xmlns:a="http://schemas.openxmlformats.org/drawingml/2006/main" xmlns:p="http://schemas.openxmlformats.org/presentationml/2006/main" xmlns:r="http://schemas.openxmlformats.org/officeDocument/2006/relationships">
+  <p:cSld>
+    <p:spTree>
+      <p:nvGrpSpPr>
+        <p:cNvPr id="1" name=""/>
+        <p:cNvGrpSpPr/>
+        <p:nvPr/>
+      </p:nvGrpSpPr>
+      <p:grpSpPr/>
+      <p:sp>
+        <p:nvSpPr>
+          <p:cNvPr id="2" name="TextBox 1"/>
+          <p:cNvSpPr txBox="1"/>
+          <p:nvPr/>
+        </p:nvSpPr>
+        <p:spPr>
+          <a:xfrm>
+            <a:off x="548640" y="365760"/>
+            <a:ext cx="11064240" cy="6126480"/>
+          </a:xfrm>
+          <a:prstGeom prst="rect">
+            <a:avLst/>
+          </a:prstGeom>
+          <a:noFill/>
+        </p:spPr>
+        <p:txBody>
+          <a:bodyPr wrap="square">
+            <a:spAutoFit/>
+          </a:bodyPr>
+          <a:lstStyle/>
+          <a:p/>
+          <a:p>
+            <a:pPr>
+              <a:defRPr sz="1800" b="1"/>
+            </a:pPr>
+            <a:r>
+              <a:t>#14  超自然行动组出号，标价出不刀 超自然行动组出号，标价出不刀 小黄遗失的童话/故宫皮+莉莉情公主 +薇薇安128魔盒+阿念128魔盒/故宫皮 +巫铃儿素影瑶光+爱丽丝故宫皮/丝缕哀歌 小黄耀世9抽 薇薇安耀世6抽 小鲨匕首5抽 小狗蛇点点3抽 现赛季魔盒满级，铲铲币几...</a:t>
+            </a:r>
+          </a:p>
+          <a:p>
+            <a:pPr>
+              <a:defRPr sz="1400"/>
+            </a:pPr>
+            <a:r>
+              <a:t>价格：2.16    销量/想要：</a:t>
+            </a:r>
+          </a:p>
+          <a:p>
+            <a:pPr>
+              <a:defRPr sz="1400"/>
+            </a:pPr>
+            <a:r>
+              <a:t>店铺/卖家：北周潜水黑水母    发货地：</a:t>
+            </a:r>
+          </a:p>
+          <a:p>
+            <a:pPr>
+              <a:defRPr sz="1400"/>
+            </a:pPr>
+            <a:r>
+              <a:t>SKU：详情页无SKU区块或需登录</a:t>
+            </a:r>
+          </a:p>
+          <a:p>
+            <a:pPr>
+              <a:defRPr sz="1400"/>
+            </a:pPr>
+            <a:r>
+              <a:t>卖点：待核验</a:t>
+            </a:r>
+          </a:p>
+          <a:p>
+            <a:pPr>
+              <a:defRPr sz="1400"/>
+            </a:pPr>
+            <a:r>
+              <a:t>链接：https://www.goofish.com/item?id=1088252144782</a:t>
+            </a:r>
+          </a:p>
+        </p:txBody>
+      </p:sp>
+    </p:spTree>
+  </p:cSld>
+  <p:clrMapOvr>
+    <a:masterClrMapping/>
+  </p:clrMapOvr>
+</p:sld>
+</file>
+
+<file path=ppt/slides/slide16.xml><?xml version="1.0" encoding="utf-8"?>
+<p:sld xmlns:a="http://schemas.openxmlformats.org/drawingml/2006/main" xmlns:p="http://schemas.openxmlformats.org/presentationml/2006/main" xmlns:r="http://schemas.openxmlformats.org/officeDocument/2006/relationships">
+  <p:cSld>
+    <p:spTree>
+      <p:nvGrpSpPr>
+        <p:cNvPr id="1" name=""/>
+        <p:cNvGrpSpPr/>
+        <p:nvPr/>
+      </p:nvGrpSpPr>
+      <p:grpSpPr/>
+      <p:sp>
+        <p:nvSpPr>
+          <p:cNvPr id="2" name="TextBox 1"/>
+          <p:cNvSpPr txBox="1"/>
+          <p:nvPr/>
+        </p:nvSpPr>
+        <p:spPr>
+          <a:xfrm>
+            <a:off x="548640" y="365760"/>
+            <a:ext cx="11064240" cy="6126480"/>
+          </a:xfrm>
+          <a:prstGeom prst="rect">
+            <a:avLst/>
+          </a:prstGeom>
+          <a:noFill/>
+        </p:spPr>
+        <p:txBody>
+          <a:bodyPr wrap="square">
+            <a:spAutoFit/>
+          </a:bodyPr>
+          <a:lstStyle/>
+          <a:p/>
+          <a:p>
+            <a:pPr>
+              <a:defRPr sz="1800" b="1"/>
+            </a:pPr>
+            <a:r>
+              <a:t>#15  超自然行动组50万新大金 随机出一个珠9.9r指定出一个珠15.5r随机两个珠17.9r期间出/雮尘珠/飞天神龙像/九龙九凤冠/祈愿圣杯直接结单 纯绿 可莉莉附身 可上号（上号打会更快）包装备 包损耗</a:t>
+            </a:r>
+          </a:p>
+          <a:p>
+            <a:pPr>
+              <a:defRPr sz="1400"/>
+            </a:pPr>
+            <a:r>
+              <a:t>价格：9.9    销量/想要：</a:t>
+            </a:r>
+          </a:p>
+          <a:p>
+            <a:pPr>
+              <a:defRPr sz="1400"/>
+            </a:pPr>
+            <a:r>
+              <a:t>店铺/卖家：羊尾唧唧想要立    发货地：</a:t>
+            </a:r>
+          </a:p>
+          <a:p>
+            <a:pPr>
+              <a:defRPr sz="1400"/>
+            </a:pPr>
+            <a:r>
+              <a:t>SKU：详情页无SKU区块或需登录</a:t>
+            </a:r>
+          </a:p>
+          <a:p>
+            <a:pPr>
+              <a:defRPr sz="1400"/>
+            </a:pPr>
+            <a:r>
+              <a:t>卖点：待核验</a:t>
+            </a:r>
+          </a:p>
+          <a:p>
+            <a:pPr>
+              <a:defRPr sz="1400"/>
+            </a:pPr>
+            <a:r>
+              <a:t>链接：https://www.goofish.com/item?id=1086154139589</a:t>
             </a:r>
           </a:p>
         </p:txBody>
@@ -3399,31 +3818,31 @@
               <a:defRPr sz="1800" b="1"/>
             </a:pPr>
             <a:r>
-              <a:t>#1  [演示] 闲鱼 超自然行动组摸金陪 同行 1号</a:t>
-            </a:r>
-          </a:p>
-          <a:p>
-            <a:pPr>
-              <a:defRPr sz="1400"/>
-            </a:pPr>
-            <a:r>
-              <a:t>价格：21.0    销量/想要：20人想要</a:t>
-            </a:r>
-          </a:p>
-          <a:p>
-            <a:pPr>
-              <a:defRPr sz="1400"/>
-            </a:pPr>
-            <a:r>
-              <a:t>店铺/卖家：卖家1（演示）    发货地：广东深圳</a:t>
-            </a:r>
-          </a:p>
-          <a:p>
-            <a:pPr>
-              <a:defRPr sz="1400"/>
-            </a:pPr>
-            <a:r>
-              <a:t>SKU：详情页为演示地址或无详情链接</a:t>
+              <a:t>#1  1.56r出【超自然行动组-中华小厨娘】兑换码 官方全渠道可用！ 官方CDK兑换，下单自动秒发兑换码 虚拟商品，付款后立马发 注意：如领取失败支持无理由退款 需要直接拍，有问题随时私聊</a:t>
+            </a:r>
+          </a:p>
+          <a:p>
+            <a:pPr>
+              <a:defRPr sz="1400"/>
+            </a:pPr>
+            <a:r>
+              <a:t>价格：1.56    销量/想要：</a:t>
+            </a:r>
+          </a:p>
+          <a:p>
+            <a:pPr>
+              <a:defRPr sz="1400"/>
+            </a:pPr>
+            <a:r>
+              <a:t>店铺/卖家：你最爱的票卷bb    发货地：</a:t>
+            </a:r>
+          </a:p>
+          <a:p>
+            <a:pPr>
+              <a:defRPr sz="1400"/>
+            </a:pPr>
+            <a:r>
+              <a:t>SKU：详情页无SKU区块或需登录</a:t>
             </a:r>
           </a:p>
           <a:p>
@@ -3439,7 +3858,7 @@
               <a:defRPr sz="1400"/>
             </a:pPr>
             <a:r>
-              <a:t>链接：https://example.invalid/demo/xianyu/1</a:t>
+              <a:t>链接：https://www.goofish.com/item?id=1084414636105</a:t>
             </a:r>
           </a:p>
         </p:txBody>
@@ -3489,31 +3908,31 @@
               <a:defRPr sz="1800" b="1"/>
             </a:pPr>
             <a:r>
-              <a:t>#2  [演示] 闲鱼 超自然行动组摸金陪 同行 2号</a:t>
-            </a:r>
-          </a:p>
-          <a:p>
-            <a:pPr>
-              <a:defRPr sz="1400"/>
-            </a:pPr>
-            <a:r>
-              <a:t>价格：27.0    销量/想要：40人想要</a:t>
-            </a:r>
-          </a:p>
-          <a:p>
-            <a:pPr>
-              <a:defRPr sz="1400"/>
-            </a:pPr>
-            <a:r>
-              <a:t>店铺/卖家：卖家2（演示）    发货地：广东深圳</a:t>
-            </a:r>
-          </a:p>
-          <a:p>
-            <a:pPr>
-              <a:defRPr sz="1400"/>
-            </a:pPr>
-            <a:r>
-              <a:t>SKU：详情页为演示地址或无详情链接</a:t>
+              <a:t>#2  超自然行动组【小熊猫，血C,维雨，繁星，神威】 【24小时自动发货】无需问在不在，全天拍下秒发货 超自然显棺除雾，附带完整教程  安卓可以拍！ iOS，鸿蒙勿拍！ ❗  ❗   ❗  无需问能不能用，能上架就是能用 仅支持安卓系统！！！新版本超自然，小熊猫，维雨，Dany，血C，等等...</a:t>
+            </a:r>
+          </a:p>
+          <a:p>
+            <a:pPr>
+              <a:defRPr sz="1400"/>
+            </a:pPr>
+            <a:r>
+              <a:t>价格：1    销量/想要：</a:t>
+            </a:r>
+          </a:p>
+          <a:p>
+            <a:pPr>
+              <a:defRPr sz="1400"/>
+            </a:pPr>
+            <a:r>
+              <a:t>店铺/卖家：网络通讯    发货地：</a:t>
+            </a:r>
+          </a:p>
+          <a:p>
+            <a:pPr>
+              <a:defRPr sz="1400"/>
+            </a:pPr>
+            <a:r>
+              <a:t>SKU：详情页无SKU区块或需登录</a:t>
             </a:r>
           </a:p>
           <a:p>
@@ -3529,7 +3948,7 @@
               <a:defRPr sz="1400"/>
             </a:pPr>
             <a:r>
-              <a:t>链接：https://example.invalid/demo/xianyu/2</a:t>
+              <a:t>链接：https://www.goofish.com/item?id=1064487244282</a:t>
             </a:r>
           </a:p>
         </p:txBody>
@@ -3579,31 +3998,31 @@
               <a:defRPr sz="1800" b="1"/>
             </a:pPr>
             <a:r>
-              <a:t>#3  [演示] 闲鱼 超自然行动组摸金陪 同行 3号</a:t>
-            </a:r>
-          </a:p>
-          <a:p>
-            <a:pPr>
-              <a:defRPr sz="1400"/>
-            </a:pPr>
-            <a:r>
-              <a:t>价格：33.0    销量/想要：60人想要</a:t>
-            </a:r>
-          </a:p>
-          <a:p>
-            <a:pPr>
-              <a:defRPr sz="1400"/>
-            </a:pPr>
-            <a:r>
-              <a:t>店铺/卖家：卖家3（演示）    发货地：广东深圳</a:t>
-            </a:r>
-          </a:p>
-          <a:p>
-            <a:pPr>
-              <a:defRPr sz="1400"/>
-            </a:pPr>
-            <a:r>
-              <a:t>SKU：详情页为演示地址或无详情链接</a:t>
+              <a:t>#3  【邮箱发货】超自然行动组，真天王20只 拍下付款后发送:ID➕邮箱赠送哦 邮箱上限未送满20只当天可补（补发小号）过天不补！！ 拍下默认成年，虚拟物品，不退不换，感谢配合～  超自然真天王 真天王超自然葫芦 超自然怪物葫芦</a:t>
+            </a:r>
+          </a:p>
+          <a:p>
+            <a:pPr>
+              <a:defRPr sz="1400"/>
+            </a:pPr>
+            <a:r>
+              <a:t>价格：2    销量/想要：</a:t>
+            </a:r>
+          </a:p>
+          <a:p>
+            <a:pPr>
+              <a:defRPr sz="1400"/>
+            </a:pPr>
+            <a:r>
+              <a:t>店铺/卖家：速趴贝吉塔    发货地：</a:t>
+            </a:r>
+          </a:p>
+          <a:p>
+            <a:pPr>
+              <a:defRPr sz="1400"/>
+            </a:pPr>
+            <a:r>
+              <a:t>SKU：详情页无SKU区块或需登录</a:t>
             </a:r>
           </a:p>
           <a:p>
@@ -3619,7 +4038,7 @@
               <a:defRPr sz="1400"/>
             </a:pPr>
             <a:r>
-              <a:t>链接：https://example.invalid/demo/xianyu/3</a:t>
+              <a:t>链接：https://www.goofish.com/item?id=1060082078518</a:t>
             </a:r>
           </a:p>
         </p:txBody>
@@ -3669,31 +4088,31 @@
               <a:defRPr sz="1800" b="1"/>
             </a:pPr>
             <a:r>
-              <a:t>#4  [演示] 闲鱼 超自然行动组 同行 1号</a:t>
-            </a:r>
-          </a:p>
-          <a:p>
-            <a:pPr>
-              <a:defRPr sz="1400"/>
-            </a:pPr>
-            <a:r>
-              <a:t>价格：21.0    销量/想要：20人想要</a:t>
-            </a:r>
-          </a:p>
-          <a:p>
-            <a:pPr>
-              <a:defRPr sz="1400"/>
-            </a:pPr>
-            <a:r>
-              <a:t>店铺/卖家：卖家1（演示）    发货地：广东深圳</a:t>
-            </a:r>
-          </a:p>
-          <a:p>
-            <a:pPr>
-              <a:defRPr sz="1400"/>
-            </a:pPr>
-            <a:r>
-              <a:t>SKU：详情页为演示地址或无详情链接</a:t>
+              <a:t>#4  1.56r出【超自然行动组-中华小厨娘】兑换码 1.56r出【超自然行动组-中华小厨娘】兑换码 官方全渠道可用！ 官方CDK兑换，下单自动秒发兑换码 虚拟商品，付款后立马发 注意：如领取失败支持无理由退款 需要直接拍，有问题随时私聊</a:t>
+            </a:r>
+          </a:p>
+          <a:p>
+            <a:pPr>
+              <a:defRPr sz="1400"/>
+            </a:pPr>
+            <a:r>
+              <a:t>价格：1.56    销量/想要：</a:t>
+            </a:r>
+          </a:p>
+          <a:p>
+            <a:pPr>
+              <a:defRPr sz="1400"/>
+            </a:pPr>
+            <a:r>
+              <a:t>店铺/卖家：北周潜水黑水母    发货地：</a:t>
+            </a:r>
+          </a:p>
+          <a:p>
+            <a:pPr>
+              <a:defRPr sz="1400"/>
+            </a:pPr>
+            <a:r>
+              <a:t>SKU：详情页无SKU区块或需登录</a:t>
             </a:r>
           </a:p>
           <a:p>
@@ -3709,7 +4128,7 @@
               <a:defRPr sz="1400"/>
             </a:pPr>
             <a:r>
-              <a:t>链接：https://example.invalid/demo/xianyu/4</a:t>
+              <a:t>链接：https://www.goofish.com/item?id=1084574729465</a:t>
             </a:r>
           </a:p>
         </p:txBody>
@@ -3759,31 +4178,31 @@
               <a:defRPr sz="1800" b="1"/>
             </a:pPr>
             <a:r>
-              <a:t>#5  [演示] 闲鱼 超自然行动组 同行 2号</a:t>
-            </a:r>
-          </a:p>
-          <a:p>
-            <a:pPr>
-              <a:defRPr sz="1400"/>
-            </a:pPr>
-            <a:r>
-              <a:t>价格：27.0    销量/想要：40人想要</a:t>
-            </a:r>
-          </a:p>
-          <a:p>
-            <a:pPr>
-              <a:defRPr sz="1400"/>
-            </a:pPr>
-            <a:r>
-              <a:t>店铺/卖家：卖家2（演示）    发货地：广东深圳</a:t>
-            </a:r>
-          </a:p>
-          <a:p>
-            <a:pPr>
-              <a:defRPr sz="1400"/>
-            </a:pPr>
-            <a:r>
-              <a:t>SKU：详情页为演示地址或无详情链接</a:t>
+              <a:t>#5  超自然行动组饿了么联动头套兑换码 淘宝闪购联动头套 拍下秒发兑换码，虚拟商品，直接到账 安卓苹果都能用，操作简单  拍下后会发兑换码 根据教程进行兑换 如果兑换失败支持无理由退款 链接在就是有货</a:t>
+            </a:r>
+          </a:p>
+          <a:p>
+            <a:pPr>
+              <a:defRPr sz="1400"/>
+            </a:pPr>
+            <a:r>
+              <a:t>价格：1    销量/想要：</a:t>
+            </a:r>
+          </a:p>
+          <a:p>
+            <a:pPr>
+              <a:defRPr sz="1400"/>
+            </a:pPr>
+            <a:r>
+              <a:t>店铺/卖家：虎鲸卡劵    发货地：</a:t>
+            </a:r>
+          </a:p>
+          <a:p>
+            <a:pPr>
+              <a:defRPr sz="1400"/>
+            </a:pPr>
+            <a:r>
+              <a:t>SKU：详情页无SKU区块或需登录</a:t>
             </a:r>
           </a:p>
           <a:p>
@@ -3799,7 +4218,7 @@
               <a:defRPr sz="1400"/>
             </a:pPr>
             <a:r>
-              <a:t>链接：https://example.invalid/demo/xianyu/5</a:t>
+              <a:t>链接：https://www.goofish.com/item?id=1069030833276</a:t>
             </a:r>
           </a:p>
         </p:txBody>
@@ -3849,31 +4268,31 @@
               <a:defRPr sz="1800" b="1"/>
             </a:pPr>
             <a:r>
-              <a:t>#6  [演示] 闲鱼 超自然行动组 同行 3号</a:t>
-            </a:r>
-          </a:p>
-          <a:p>
-            <a:pPr>
-              <a:defRPr sz="1400"/>
-            </a:pPr>
-            <a:r>
-              <a:t>价格：33.0    销量/想要：60人想要</a:t>
-            </a:r>
-          </a:p>
-          <a:p>
-            <a:pPr>
-              <a:defRPr sz="1400"/>
-            </a:pPr>
-            <a:r>
-              <a:t>店铺/卖家：卖家3（演示）    发货地：广东深圳</a:t>
-            </a:r>
-          </a:p>
-          <a:p>
-            <a:pPr>
-              <a:defRPr sz="1400"/>
-            </a:pPr>
-            <a:r>
-              <a:t>SKU：详情页为演示地址或无详情链接</a:t>
+              <a:t>#6  超自然行动组罗森联动兑换码 【24小时自动发货】超自然行动组罗森联动兑换码头像框森友同行头套CDK联动活动限定  仅道具兑换码，无实物  商品已设置24小时自动发货，下单直接给兑换码，自助下单～～ 虚拟商品，发货后非商品原因不退不换</a:t>
+            </a:r>
+          </a:p>
+          <a:p>
+            <a:pPr>
+              <a:defRPr sz="1400"/>
+            </a:pPr>
+            <a:r>
+              <a:t>价格：1    销量/想要：</a:t>
+            </a:r>
+          </a:p>
+          <a:p>
+            <a:pPr>
+              <a:defRPr sz="1400"/>
+            </a:pPr>
+            <a:r>
+              <a:t>店铺/卖家：游戏兑换码    发货地：</a:t>
+            </a:r>
+          </a:p>
+          <a:p>
+            <a:pPr>
+              <a:defRPr sz="1400"/>
+            </a:pPr>
+            <a:r>
+              <a:t>SKU：详情页无SKU区块或需登录</a:t>
             </a:r>
           </a:p>
           <a:p>
@@ -3889,7 +4308,7 @@
               <a:defRPr sz="1400"/>
             </a:pPr>
             <a:r>
-              <a:t>链接：https://example.invalid/demo/xianyu/6</a:t>
+              <a:t>链接：https://www.goofish.com/item?id=1067135341402</a:t>
             </a:r>
           </a:p>
         </p:txBody>
@@ -3939,31 +4358,31 @@
               <a:defRPr sz="1800" b="1"/>
             </a:pPr>
             <a:r>
-              <a:t>#7  [演示] 闲鱼 摸金陪玩 同行 1号</a:t>
-            </a:r>
-          </a:p>
-          <a:p>
-            <a:pPr>
-              <a:defRPr sz="1400"/>
-            </a:pPr>
-            <a:r>
-              <a:t>价格：21.0    销量/想要：20人想要</a:t>
-            </a:r>
-          </a:p>
-          <a:p>
-            <a:pPr>
-              <a:defRPr sz="1400"/>
-            </a:pPr>
-            <a:r>
-              <a:t>店铺/卖家：卖家1（演示）    发货地：广东深圳</a:t>
-            </a:r>
-          </a:p>
-          <a:p>
-            <a:pPr>
-              <a:defRPr sz="1400"/>
-            </a:pPr>
-            <a:r>
-              <a:t>SKU：详情页为演示地址或无详情链接</a:t>
+              <a:t>#7  1.87r出【超自然行动组-中华小厨娘】cdk兑换码官方全渠 道可用![火][火]  官方CDK兑换，下单自动秒发兑换码 虚拟商品，付款后立马发[比心][比心]  【注意：如领取失败支持无理由退款】！！ 需要直接拍，链接还在就是还有货</a:t>
+            </a:r>
+          </a:p>
+          <a:p>
+            <a:pPr>
+              <a:defRPr sz="1400"/>
+            </a:pPr>
+            <a:r>
+              <a:t>价格：1.87    销量/想要：</a:t>
+            </a:r>
+          </a:p>
+          <a:p>
+            <a:pPr>
+              <a:defRPr sz="1400"/>
+            </a:pPr>
+            <a:r>
+              <a:t>店铺/卖家：爩鱻麤龗灪厵    发货地：</a:t>
+            </a:r>
+          </a:p>
+          <a:p>
+            <a:pPr>
+              <a:defRPr sz="1400"/>
+            </a:pPr>
+            <a:r>
+              <a:t>SKU：详情页无SKU区块或需登录</a:t>
             </a:r>
           </a:p>
           <a:p>
@@ -3979,7 +4398,7 @@
               <a:defRPr sz="1400"/>
             </a:pPr>
             <a:r>
-              <a:t>链接：https://example.invalid/demo/xianyu/7</a:t>
+              <a:t>链接：https://www.goofish.com/item?id=1043438047952</a:t>
             </a:r>
           </a:p>
         </p:txBody>
@@ -4029,31 +4448,31 @@
               <a:defRPr sz="1800" b="1"/>
             </a:pPr>
             <a:r>
-              <a:t>#8  [演示] 闲鱼 摸金陪玩 同行 2号</a:t>
-            </a:r>
-          </a:p>
-          <a:p>
-            <a:pPr>
-              <a:defRPr sz="1400"/>
-            </a:pPr>
-            <a:r>
-              <a:t>价格：27.0    销量/想要：40人想要</a:t>
-            </a:r>
-          </a:p>
-          <a:p>
-            <a:pPr>
-              <a:defRPr sz="1400"/>
-            </a:pPr>
-            <a:r>
-              <a:t>店铺/卖家：卖家2（演示）    发货地：广东深圳</a:t>
-            </a:r>
-          </a:p>
-          <a:p>
-            <a:pPr>
-              <a:defRPr sz="1400"/>
-            </a:pPr>
-            <a:r>
-              <a:t>SKU：详情页为演示地址或无详情链接</a:t>
+              <a:t>#8  9.9开天宫（纯绿） 【超自然行动组·云南虫谷·开天宫·纯绿】 [绿圆]高质量百人大团，下单开打！ [绿圆]纯绿陪陪，技术有保障 [绿圆]售后超级好！！！有任何问题第一时间解决，绝不拖沓敷衍 [绿圆]内有点群 [闪亮]...</a:t>
+            </a:r>
+          </a:p>
+          <a:p>
+            <a:pPr>
+              <a:defRPr sz="1400"/>
+            </a:pPr>
+            <a:r>
+              <a:t>价格：9.99    销量/想要：</a:t>
+            </a:r>
+          </a:p>
+          <a:p>
+            <a:pPr>
+              <a:defRPr sz="1400"/>
+            </a:pPr>
+            <a:r>
+              <a:t>店铺/卖家：超自然行动组    发货地：</a:t>
+            </a:r>
+          </a:p>
+          <a:p>
+            <a:pPr>
+              <a:defRPr sz="1400"/>
+            </a:pPr>
+            <a:r>
+              <a:t>SKU：详情页无SKU区块或需登录</a:t>
             </a:r>
           </a:p>
           <a:p>
@@ -4069,7 +4488,7 @@
               <a:defRPr sz="1400"/>
             </a:pPr>
             <a:r>
-              <a:t>链接：https://example.invalid/demo/xianyu/8</a:t>
+              <a:t>链接：https://www.goofish.com/item?id=1064155671003</a:t>
             </a:r>
           </a:p>
         </p:txBody>
